--- a/content/W01/D1/slides/C2_W01_D01_intro_STUDENT.pptx
+++ b/content/W01/D1/slides/C2_W01_D01_intro_STUDENT.pptx
@@ -3231,7 +3231,7 @@
           <a:noFill/>
         </p:spPr>
         <p:txBody>
-          <a:bodyPr wrap="square" anchor="ctr">
+          <a:bodyPr wrap="square" anchor="ctr" lIns="0" rIns="0" tIns="0" bIns="0">
             <a:spAutoFit/>
           </a:bodyPr>
           <a:lstStyle/>
@@ -3309,7 +3309,7 @@
           <a:noFill/>
         </p:spPr>
         <p:txBody>
-          <a:bodyPr wrap="square" anchor="t">
+          <a:bodyPr wrap="square" anchor="t" lIns="0" rIns="0" tIns="0" bIns="0">
             <a:spAutoFit/>
           </a:bodyPr>
           <a:lstStyle/>
@@ -3424,7 +3424,7 @@
           <a:noFill/>
         </p:spPr>
         <p:txBody>
-          <a:bodyPr wrap="square" anchor="t">
+          <a:bodyPr wrap="square" anchor="t" lIns="0" rIns="0" tIns="0" bIns="0">
             <a:spAutoFit/>
           </a:bodyPr>
           <a:lstStyle/>
@@ -3458,7 +3458,7 @@
           <a:noFill/>
         </p:spPr>
         <p:txBody>
-          <a:bodyPr wrap="square" anchor="t">
+          <a:bodyPr wrap="square" anchor="t" lIns="0" rIns="0" tIns="0" bIns="0">
             <a:spAutoFit/>
           </a:bodyPr>
           <a:lstStyle/>
@@ -3608,7 +3608,7 @@
           <a:noFill/>
         </p:spPr>
         <p:txBody>
-          <a:bodyPr wrap="square" anchor="ctr">
+          <a:bodyPr wrap="square" anchor="ctr" lIns="0" rIns="0" tIns="0" bIns="0">
             <a:spAutoFit/>
           </a:bodyPr>
           <a:lstStyle/>
@@ -3669,48 +3669,9 @@
           </a:p>
         </p:txBody>
       </p:sp>
-      <p:sp>
-        <p:nvSpPr>
-          <p:cNvPr id="6" name="TextBox 5"/>
-          <p:cNvSpPr txBox="1"/>
-          <p:nvPr/>
-        </p:nvSpPr>
-        <p:spPr>
-          <a:xfrm>
-            <a:off x="685800" y="1627632"/>
-            <a:ext cx="10820095" cy="478536"/>
-          </a:xfrm>
-          <a:prstGeom prst="rect">
-            <a:avLst/>
-          </a:prstGeom>
-          <a:noFill/>
-        </p:spPr>
-        <p:txBody>
-          <a:bodyPr wrap="square" anchor="t">
-            <a:spAutoFit/>
-          </a:bodyPr>
-          <a:lstStyle/>
-          <a:p>
-            <a:pPr>
-              <a:spcAft>
-                <a:spcPts val="700"/>
-              </a:spcAft>
-            </a:pPr>
-            <a:r>
-              <a:rPr sz="1500" b="0">
-                <a:solidFill>
-                  <a:srgbClr val="1C1C1A"/>
-                </a:solidFill>
-                <a:latin typeface="Calibri"/>
-              </a:rPr>
-              <a:t>These are the tables of Kalpa Retail. Today you meet one of them, as a list.</a:t>
-            </a:r>
-          </a:p>
-        </p:txBody>
-      </p:sp>
       <p:pic>
         <p:nvPicPr>
-          <p:cNvPr id="7" name="Picture 6" descr="f2b8459e23a28143.png"/>
+          <p:cNvPr id="6" name="Picture 5" descr="e50df6227d1ecfbb.png"/>
           <p:cNvPicPr>
             <a:picLocks noChangeAspect="1"/>
           </p:cNvPicPr>
@@ -3724,14 +3685,48 @@
         </p:blipFill>
         <p:spPr>
           <a:xfrm>
-            <a:off x="3164818" y="2234184"/>
-            <a:ext cx="5862058" cy="3819143"/>
+            <a:off x="2178961" y="1627632"/>
+            <a:ext cx="7833772" cy="3805935"/>
           </a:xfrm>
           <a:prstGeom prst="rect">
             <a:avLst/>
           </a:prstGeom>
         </p:spPr>
       </p:pic>
+      <p:sp>
+        <p:nvSpPr>
+          <p:cNvPr id="7" name="TextBox 6"/>
+          <p:cNvSpPr txBox="1"/>
+          <p:nvPr/>
+        </p:nvSpPr>
+        <p:spPr>
+          <a:xfrm>
+            <a:off x="685800" y="5543296"/>
+            <a:ext cx="10820095" cy="510032"/>
+          </a:xfrm>
+          <a:prstGeom prst="rect">
+            <a:avLst/>
+          </a:prstGeom>
+          <a:noFill/>
+        </p:spPr>
+        <p:txBody>
+          <a:bodyPr wrap="square" anchor="t" lIns="0" rIns="0" tIns="0" bIns="0">
+            <a:spAutoFit/>
+          </a:bodyPr>
+          <a:lstStyle/>
+          <a:p>
+            <a:r>
+              <a:rPr sz="2000" b="0">
+                <a:solidFill>
+                  <a:srgbClr val="1C1C1A"/>
+                </a:solidFill>
+                <a:latin typeface="Calibri"/>
+              </a:rPr>
+              <a:t>These are the tables of Kalpa Retail. Today you meet one of them, as a list.</a:t>
+            </a:r>
+          </a:p>
+        </p:txBody>
+      </p:sp>
       <p:sp>
         <p:nvSpPr>
           <p:cNvPr id="8" name="Rectangle 7"/>
@@ -3793,7 +3788,7 @@
           <a:noFill/>
         </p:spPr>
         <p:txBody>
-          <a:bodyPr wrap="square" anchor="t">
+          <a:bodyPr wrap="square" anchor="t" lIns="0" rIns="0" tIns="0" bIns="0">
             <a:spAutoFit/>
           </a:bodyPr>
           <a:lstStyle/>
@@ -3827,7 +3822,7 @@
           <a:noFill/>
         </p:spPr>
         <p:txBody>
-          <a:bodyPr wrap="square" anchor="t">
+          <a:bodyPr wrap="square" anchor="t" lIns="0" rIns="0" tIns="0" bIns="0">
             <a:spAutoFit/>
           </a:bodyPr>
           <a:lstStyle/>
@@ -3977,7 +3972,7 @@
           <a:noFill/>
         </p:spPr>
         <p:txBody>
-          <a:bodyPr wrap="square" anchor="ctr">
+          <a:bodyPr wrap="square" anchor="ctr" lIns="0" rIns="0" tIns="0" bIns="0">
             <a:spAutoFit/>
           </a:bodyPr>
           <a:lstStyle/>
@@ -4046,8 +4041,8 @@
         </p:nvSpPr>
         <p:spPr>
           <a:xfrm>
-            <a:off x="685800" y="2074672"/>
-            <a:ext cx="10820095" cy="3531616"/>
+            <a:off x="685800" y="1901952"/>
+            <a:ext cx="10820095" cy="3877056"/>
           </a:xfrm>
           <a:prstGeom prst="rect">
             <a:avLst/>
@@ -4055,7 +4050,7 @@
           <a:noFill/>
         </p:spPr>
         <p:txBody>
-          <a:bodyPr wrap="square" anchor="t">
+          <a:bodyPr wrap="square" anchor="t" lIns="0" rIns="0" tIns="0" bIns="0">
             <a:spAutoFit/>
           </a:bodyPr>
           <a:lstStyle/>
@@ -4218,7 +4213,7 @@
           <a:noFill/>
         </p:spPr>
         <p:txBody>
-          <a:bodyPr wrap="square" anchor="t">
+          <a:bodyPr wrap="square" anchor="t" lIns="0" rIns="0" tIns="0" bIns="0">
             <a:spAutoFit/>
           </a:bodyPr>
           <a:lstStyle/>
@@ -4252,7 +4247,7 @@
           <a:noFill/>
         </p:spPr>
         <p:txBody>
-          <a:bodyPr wrap="square" anchor="t">
+          <a:bodyPr wrap="square" anchor="t" lIns="0" rIns="0" tIns="0" bIns="0">
             <a:spAutoFit/>
           </a:bodyPr>
           <a:lstStyle/>
@@ -4402,7 +4397,7 @@
           <a:noFill/>
         </p:spPr>
         <p:txBody>
-          <a:bodyPr wrap="square" anchor="ctr">
+          <a:bodyPr wrap="square" anchor="ctr" lIns="0" rIns="0" tIns="0" bIns="0">
             <a:spAutoFit/>
           </a:bodyPr>
           <a:lstStyle/>
@@ -4471,8 +4466,8 @@
         </p:nvSpPr>
         <p:spPr>
           <a:xfrm>
-            <a:off x="685800" y="2105162"/>
-            <a:ext cx="10820095" cy="2621280"/>
+            <a:off x="685800" y="1627632"/>
+            <a:ext cx="10820095" cy="1844040"/>
           </a:xfrm>
           <a:prstGeom prst="rect">
             <a:avLst/>
@@ -4480,18 +4475,18 @@
           <a:noFill/>
         </p:spPr>
         <p:txBody>
-          <a:bodyPr wrap="square" anchor="t">
+          <a:bodyPr wrap="square" anchor="t" lIns="0" rIns="0" tIns="0" bIns="0">
             <a:spAutoFit/>
           </a:bodyPr>
           <a:lstStyle/>
           <a:p>
             <a:pPr>
               <a:spcAft>
-                <a:spcPts val="900"/>
+                <a:spcPts val="700"/>
               </a:spcAft>
             </a:pPr>
             <a:r>
-              <a:rPr sz="2000" b="0">
+              <a:rPr sz="1500" b="0">
                 <a:solidFill>
                   <a:srgbClr val="1C1C1A"/>
                 </a:solidFill>
@@ -4503,11 +4498,11 @@
           <a:p>
             <a:pPr>
               <a:spcAft>
-                <a:spcPts val="900"/>
+                <a:spcPts val="700"/>
               </a:spcAft>
             </a:pPr>
             <a:r>
-              <a:rPr sz="2000" b="0">
+              <a:rPr sz="1500" b="0">
                 <a:solidFill>
                   <a:srgbClr val="1C1C1A"/>
                 </a:solidFill>
@@ -4519,11 +4514,11 @@
           <a:p>
             <a:pPr>
               <a:spcAft>
-                <a:spcPts val="900"/>
+                <a:spcPts val="700"/>
               </a:spcAft>
             </a:pPr>
             <a:r>
-              <a:rPr sz="2000" b="0">
+              <a:rPr sz="1500" b="0">
                 <a:solidFill>
                   <a:srgbClr val="1C1C1A"/>
                 </a:solidFill>
@@ -4535,11 +4530,11 @@
           <a:p>
             <a:pPr>
               <a:spcAft>
-                <a:spcPts val="900"/>
+                <a:spcPts val="700"/>
               </a:spcAft>
             </a:pPr>
             <a:r>
-              <a:rPr sz="2000" b="0">
+              <a:rPr sz="1500" b="0">
                 <a:solidFill>
                   <a:srgbClr val="1C1C1A"/>
                 </a:solidFill>
@@ -4552,7 +4547,7 @@
       </p:sp>
       <p:pic>
         <p:nvPicPr>
-          <p:cNvPr id="7" name="Picture 6" descr="f66d89a0b4eec2ef.png"/>
+          <p:cNvPr id="7" name="Picture 6" descr="940afbea73682148.png"/>
           <p:cNvPicPr>
             <a:picLocks noChangeAspect="1"/>
           </p:cNvPicPr>
@@ -4566,7 +4561,7 @@
         </p:blipFill>
         <p:spPr>
           <a:xfrm>
-            <a:off x="685800" y="4854458"/>
+            <a:off x="685800" y="4503938"/>
             <a:ext cx="10820095" cy="721339"/>
           </a:xfrm>
           <a:prstGeom prst="rect">
@@ -4635,7 +4630,7 @@
           <a:noFill/>
         </p:spPr>
         <p:txBody>
-          <a:bodyPr wrap="square" anchor="t">
+          <a:bodyPr wrap="square" anchor="t" lIns="0" rIns="0" tIns="0" bIns="0">
             <a:spAutoFit/>
           </a:bodyPr>
           <a:lstStyle/>
@@ -4669,7 +4664,7 @@
           <a:noFill/>
         </p:spPr>
         <p:txBody>
-          <a:bodyPr wrap="square" anchor="t">
+          <a:bodyPr wrap="square" anchor="t" lIns="0" rIns="0" tIns="0" bIns="0">
             <a:spAutoFit/>
           </a:bodyPr>
           <a:lstStyle/>
@@ -4819,7 +4814,7 @@
           <a:noFill/>
         </p:spPr>
         <p:txBody>
-          <a:bodyPr wrap="square" anchor="ctr">
+          <a:bodyPr wrap="square" anchor="ctr" lIns="0" rIns="0" tIns="0" bIns="0">
             <a:spAutoFit/>
           </a:bodyPr>
           <a:lstStyle/>
@@ -4897,7 +4892,7 @@
           <a:noFill/>
         </p:spPr>
         <p:txBody>
-          <a:bodyPr wrap="square" anchor="t">
+          <a:bodyPr wrap="square" anchor="t" lIns="0" rIns="0" tIns="0" bIns="0">
             <a:spAutoFit/>
           </a:bodyPr>
           <a:lstStyle/>
@@ -5012,7 +5007,7 @@
           <a:noFill/>
         </p:spPr>
         <p:txBody>
-          <a:bodyPr wrap="square" anchor="t">
+          <a:bodyPr wrap="square" anchor="t" lIns="0" rIns="0" tIns="0" bIns="0">
             <a:spAutoFit/>
           </a:bodyPr>
           <a:lstStyle/>
@@ -5046,7 +5041,7 @@
           <a:noFill/>
         </p:spPr>
         <p:txBody>
-          <a:bodyPr wrap="square" anchor="t">
+          <a:bodyPr wrap="square" anchor="t" lIns="0" rIns="0" tIns="0" bIns="0">
             <a:spAutoFit/>
           </a:bodyPr>
           <a:lstStyle/>
@@ -5196,7 +5191,7 @@
           <a:noFill/>
         </p:spPr>
         <p:txBody>
-          <a:bodyPr wrap="square" anchor="ctr">
+          <a:bodyPr wrap="square" anchor="ctr" lIns="0" rIns="0" tIns="0" bIns="0">
             <a:spAutoFit/>
           </a:bodyPr>
           <a:lstStyle/>
@@ -5274,7 +5269,7 @@
           <a:noFill/>
         </p:spPr>
         <p:txBody>
-          <a:bodyPr wrap="square" anchor="t">
+          <a:bodyPr wrap="square" anchor="t" lIns="0" rIns="0" tIns="0" bIns="0">
             <a:spAutoFit/>
           </a:bodyPr>
           <a:lstStyle/>
@@ -5373,7 +5368,7 @@
           <a:noFill/>
         </p:spPr>
         <p:txBody>
-          <a:bodyPr wrap="square" anchor="t">
+          <a:bodyPr wrap="square" anchor="t" lIns="0" rIns="0" tIns="0" bIns="0">
             <a:spAutoFit/>
           </a:bodyPr>
           <a:lstStyle/>
@@ -5407,7 +5402,7 @@
           <a:noFill/>
         </p:spPr>
         <p:txBody>
-          <a:bodyPr wrap="square" anchor="t">
+          <a:bodyPr wrap="square" anchor="t" lIns="0" rIns="0" tIns="0" bIns="0">
             <a:spAutoFit/>
           </a:bodyPr>
           <a:lstStyle/>
@@ -5504,7 +5499,7 @@
           <a:noFill/>
         </p:spPr>
         <p:txBody>
-          <a:bodyPr wrap="square" anchor="ctr">
+          <a:bodyPr wrap="square" anchor="ctr" lIns="0" rIns="0" tIns="0" bIns="0">
             <a:spAutoFit/>
           </a:bodyPr>
           <a:lstStyle/>
@@ -5742,7 +5737,7 @@
           <a:noFill/>
         </p:spPr>
         <p:txBody>
-          <a:bodyPr wrap="square" anchor="t">
+          <a:bodyPr wrap="square" anchor="t" lIns="0" rIns="0" tIns="0" bIns="0">
             <a:spAutoFit/>
           </a:bodyPr>
           <a:lstStyle/>
@@ -5776,7 +5771,7 @@
           <a:noFill/>
         </p:spPr>
         <p:txBody>
-          <a:bodyPr wrap="square" anchor="t">
+          <a:bodyPr wrap="square" anchor="t" lIns="0" rIns="0" tIns="0" bIns="0">
             <a:spAutoFit/>
           </a:bodyPr>
           <a:lstStyle/>
@@ -5926,7 +5921,7 @@
           <a:noFill/>
         </p:spPr>
         <p:txBody>
-          <a:bodyPr wrap="square" anchor="ctr">
+          <a:bodyPr wrap="square" anchor="ctr" lIns="0" rIns="0" tIns="0" bIns="0">
             <a:spAutoFit/>
           </a:bodyPr>
           <a:lstStyle/>
@@ -6004,7 +5999,7 @@
           <a:noFill/>
         </p:spPr>
         <p:txBody>
-          <a:bodyPr wrap="square" anchor="t">
+          <a:bodyPr wrap="square" anchor="t" lIns="0" rIns="0" tIns="0" bIns="0">
             <a:spAutoFit/>
           </a:bodyPr>
           <a:lstStyle/>
@@ -6036,7 +6031,7 @@
         </p:nvGraphicFramePr>
         <p:xfrm>
           <a:off x="685800" y="2320544"/>
-          <a:ext cx="10820095" cy="3641341"/>
+          <a:ext cx="10820093" cy="2377440"/>
         </p:xfrm>
         <a:graphic>
           <a:graphicData uri="http://schemas.openxmlformats.org/drawingml/2006/table">
@@ -6045,18 +6040,18 @@
                 <a:tableStyleId>{2D5ABB26-0587-4C30-8999-92F81FD0307C}</a:tableStyleId>
               </a:tblPr>
               <a:tblGrid>
-                <a:gridCol w="3606698"/>
-                <a:gridCol w="3606698"/>
-                <a:gridCol w="3606699"/>
+                <a:gridCol w="1343028"/>
+                <a:gridCol w="1488597"/>
+                <a:gridCol w="7988468"/>
               </a:tblGrid>
-              <a:tr h="217931">
+              <a:tr h="310896">
                 <a:tc>
                   <a:txBody>
                     <a:bodyPr/>
                     <a:lstStyle/>
                     <a:p>
                       <a:r>
-                        <a:rPr sz="1600" b="1">
+                        <a:rPr sz="1000" b="1">
                           <a:solidFill>
                             <a:srgbClr val="FFFFFF"/>
                           </a:solidFill>
@@ -6078,7 +6073,7 @@
                     <a:lstStyle/>
                     <a:p>
                       <a:r>
-                        <a:rPr sz="1600" b="1">
+                        <a:rPr sz="1000" b="1">
                           <a:solidFill>
                             <a:srgbClr val="FFFFFF"/>
                           </a:solidFill>
@@ -6100,7 +6095,7 @@
                     <a:lstStyle/>
                     <a:p>
                       <a:r>
-                        <a:rPr sz="1600" b="1">
+                        <a:rPr sz="1000" b="1">
                           <a:solidFill>
                             <a:srgbClr val="FFFFFF"/>
                           </a:solidFill>
@@ -6117,14 +6112,14 @@
                   </a:tcPr>
                 </a:tc>
               </a:tr>
-              <a:tr h="655510">
+              <a:tr h="438912">
                 <a:tc>
                   <a:txBody>
                     <a:bodyPr/>
                     <a:lstStyle/>
                     <a:p>
                       <a:r>
-                        <a:rPr sz="1500" b="0">
+                        <a:rPr sz="900" b="0">
                           <a:solidFill>
                             <a:srgbClr val="1C1C1A"/>
                           </a:solidFill>
@@ -6146,7 +6141,7 @@
                     <a:lstStyle/>
                     <a:p>
                       <a:r>
-                        <a:rPr sz="1500" b="0">
+                        <a:rPr sz="900" b="0">
                           <a:solidFill>
                             <a:srgbClr val="1C1C1A"/>
                           </a:solidFill>
@@ -6168,7 +6163,7 @@
                     <a:lstStyle/>
                     <a:p>
                       <a:r>
-                        <a:rPr sz="1500" b="0">
+                        <a:rPr sz="900" b="0">
                           <a:solidFill>
                             <a:srgbClr val="1C1C1A"/>
                           </a:solidFill>
@@ -6185,14 +6180,14 @@
                   </a:tcPr>
                 </a:tc>
               </a:tr>
-              <a:tr h="801370">
+              <a:tr h="438912">
                 <a:tc>
                   <a:txBody>
                     <a:bodyPr/>
                     <a:lstStyle/>
                     <a:p>
                       <a:r>
-                        <a:rPr sz="1500" b="0">
+                        <a:rPr sz="900" b="0">
                           <a:solidFill>
                             <a:srgbClr val="1C1C1A"/>
                           </a:solidFill>
@@ -6214,7 +6209,7 @@
                     <a:lstStyle/>
                     <a:p>
                       <a:r>
-                        <a:rPr sz="1500" b="0">
+                        <a:rPr sz="900" b="0">
                           <a:solidFill>
                             <a:srgbClr val="1C1C1A"/>
                           </a:solidFill>
@@ -6236,7 +6231,7 @@
                     <a:lstStyle/>
                     <a:p>
                       <a:r>
-                        <a:rPr sz="1500" b="0">
+                        <a:rPr sz="900" b="0">
                           <a:solidFill>
                             <a:srgbClr val="1C1C1A"/>
                           </a:solidFill>
@@ -6253,14 +6248,14 @@
                   </a:tcPr>
                 </a:tc>
               </a:tr>
-              <a:tr h="801370">
+              <a:tr h="438912">
                 <a:tc>
                   <a:txBody>
                     <a:bodyPr/>
                     <a:lstStyle/>
                     <a:p>
                       <a:r>
-                        <a:rPr sz="1500" b="0">
+                        <a:rPr sz="900" b="0">
                           <a:solidFill>
                             <a:srgbClr val="1C1C1A"/>
                           </a:solidFill>
@@ -6282,7 +6277,7 @@
                     <a:lstStyle/>
                     <a:p>
                       <a:r>
-                        <a:rPr sz="1500" b="0">
+                        <a:rPr sz="900" b="0">
                           <a:solidFill>
                             <a:srgbClr val="1C1C1A"/>
                           </a:solidFill>
@@ -6304,7 +6299,7 @@
                     <a:lstStyle/>
                     <a:p>
                       <a:r>
-                        <a:rPr sz="1500" b="0">
+                        <a:rPr sz="900" b="0">
                           <a:solidFill>
                             <a:srgbClr val="1C1C1A"/>
                           </a:solidFill>
@@ -6321,14 +6316,14 @@
                   </a:tcPr>
                 </a:tc>
               </a:tr>
-              <a:tr h="655510">
+              <a:tr h="438912">
                 <a:tc>
                   <a:txBody>
                     <a:bodyPr/>
                     <a:lstStyle/>
                     <a:p>
                       <a:r>
-                        <a:rPr sz="1500" b="0">
+                        <a:rPr sz="900" b="0">
                           <a:solidFill>
                             <a:srgbClr val="1C1C1A"/>
                           </a:solidFill>
@@ -6350,7 +6345,7 @@
                     <a:lstStyle/>
                     <a:p>
                       <a:r>
-                        <a:rPr sz="1500" b="0">
+                        <a:rPr sz="900" b="0">
                           <a:solidFill>
                             <a:srgbClr val="1C1C1A"/>
                           </a:solidFill>
@@ -6372,7 +6367,7 @@
                     <a:lstStyle/>
                     <a:p>
                       <a:r>
-                        <a:rPr sz="1500" b="0">
+                        <a:rPr sz="900" b="0">
                           <a:solidFill>
                             <a:srgbClr val="1C1C1A"/>
                           </a:solidFill>
@@ -6389,14 +6384,14 @@
                   </a:tcPr>
                 </a:tc>
               </a:tr>
-              <a:tr h="509650">
+              <a:tr h="310896">
                 <a:tc>
                   <a:txBody>
                     <a:bodyPr/>
                     <a:lstStyle/>
                     <a:p>
                       <a:r>
-                        <a:rPr sz="1500" b="0">
+                        <a:rPr sz="900" b="0">
                           <a:solidFill>
                             <a:srgbClr val="1C1C1A"/>
                           </a:solidFill>
@@ -6418,7 +6413,7 @@
                     <a:lstStyle/>
                     <a:p>
                       <a:r>
-                        <a:rPr sz="1500" b="0">
+                        <a:rPr sz="900" b="0">
                           <a:solidFill>
                             <a:srgbClr val="1C1C1A"/>
                           </a:solidFill>
@@ -6440,7 +6435,7 @@
                     <a:lstStyle/>
                     <a:p>
                       <a:r>
-                        <a:rPr sz="1500" b="0">
+                        <a:rPr sz="900" b="0">
                           <a:solidFill>
                             <a:srgbClr val="1C1C1A"/>
                           </a:solidFill>
@@ -6461,9 +6456,33 @@
           </a:graphicData>
         </a:graphic>
       </p:graphicFrame>
-      <p:sp>
-        <p:nvSpPr>
-          <p:cNvPr id="8" name="Rectangle 7"/>
+      <p:pic>
+        <p:nvPicPr>
+          <p:cNvPr id="8" name="Picture 7" descr="c8f54436a0cc9703.png"/>
+          <p:cNvPicPr>
+            <a:picLocks noChangeAspect="1"/>
+          </p:cNvPicPr>
+          <p:nvPr/>
+        </p:nvPicPr>
+        <p:blipFill>
+          <a:blip r:embed="rId2"/>
+          <a:stretch>
+            <a:fillRect/>
+          </a:stretch>
+        </p:blipFill>
+        <p:spPr>
+          <a:xfrm>
+            <a:off x="685800" y="5063966"/>
+            <a:ext cx="10820095" cy="879411"/>
+          </a:xfrm>
+          <a:prstGeom prst="rect">
+            <a:avLst/>
+          </a:prstGeom>
+        </p:spPr>
+      </p:pic>
+      <p:sp>
+        <p:nvSpPr>
+          <p:cNvPr id="9" name="Rectangle 8"/>
           <p:cNvSpPr/>
           <p:nvPr/>
         </p:nvSpPr>
@@ -6507,7 +6526,7 @@
       </p:sp>
       <p:sp>
         <p:nvSpPr>
-          <p:cNvPr id="9" name="TextBox 8"/>
+          <p:cNvPr id="10" name="TextBox 9"/>
           <p:cNvSpPr txBox="1"/>
           <p:nvPr/>
         </p:nvSpPr>
@@ -6522,7 +6541,7 @@
           <a:noFill/>
         </p:spPr>
         <p:txBody>
-          <a:bodyPr wrap="square" anchor="t">
+          <a:bodyPr wrap="square" anchor="t" lIns="0" rIns="0" tIns="0" bIns="0">
             <a:spAutoFit/>
           </a:bodyPr>
           <a:lstStyle/>
@@ -6541,7 +6560,7 @@
       </p:sp>
       <p:sp>
         <p:nvSpPr>
-          <p:cNvPr id="10" name="TextBox 9"/>
+          <p:cNvPr id="11" name="TextBox 10"/>
           <p:cNvSpPr txBox="1"/>
           <p:nvPr/>
         </p:nvSpPr>
@@ -6556,7 +6575,7 @@
           <a:noFill/>
         </p:spPr>
         <p:txBody>
-          <a:bodyPr wrap="square" anchor="t">
+          <a:bodyPr wrap="square" anchor="t" lIns="0" rIns="0" tIns="0" bIns="0">
             <a:spAutoFit/>
           </a:bodyPr>
           <a:lstStyle/>
@@ -6706,7 +6725,7 @@
           <a:noFill/>
         </p:spPr>
         <p:txBody>
-          <a:bodyPr wrap="square" anchor="ctr">
+          <a:bodyPr wrap="square" anchor="ctr" lIns="0" rIns="0" tIns="0" bIns="0">
             <a:spAutoFit/>
           </a:bodyPr>
           <a:lstStyle/>
@@ -6767,9 +6786,80 @@
           </a:p>
         </p:txBody>
       </p:sp>
+      <p:sp>
+        <p:nvSpPr>
+          <p:cNvPr id="6" name="TextBox 5"/>
+          <p:cNvSpPr txBox="1"/>
+          <p:nvPr/>
+        </p:nvSpPr>
+        <p:spPr>
+          <a:xfrm>
+            <a:off x="685800" y="1627632"/>
+            <a:ext cx="10820095" cy="1907032"/>
+          </a:xfrm>
+          <a:prstGeom prst="rect">
+            <a:avLst/>
+          </a:prstGeom>
+          <a:noFill/>
+        </p:spPr>
+        <p:txBody>
+          <a:bodyPr wrap="square" anchor="t" lIns="0" rIns="0" tIns="0" bIns="0">
+            <a:spAutoFit/>
+          </a:bodyPr>
+          <a:lstStyle/>
+          <a:p>
+            <a:pPr>
+              <a:spcAft>
+                <a:spcPts val="800"/>
+              </a:spcAft>
+            </a:pPr>
+            <a:r>
+              <a:rPr sz="1700" b="0">
+                <a:solidFill>
+                  <a:srgbClr val="1C1C1A"/>
+                </a:solidFill>
+                <a:latin typeface="Calibri"/>
+              </a:rPr>
+              <a:t>Build weeks fall at Weeks 3, 6, 9, 12 and 15. Weeks 17 to 20 are the capstone weeks. Every other week teaches.</a:t>
+            </a:r>
+          </a:p>
+          <a:p>
+            <a:pPr>
+              <a:spcAft>
+                <a:spcPts val="800"/>
+              </a:spcAft>
+            </a:pPr>
+            <a:r>
+              <a:rPr sz="1700" b="0">
+                <a:solidFill>
+                  <a:srgbClr val="1C1C1A"/>
+                </a:solidFill>
+                <a:latin typeface="Calibri"/>
+              </a:rPr>
+              <a:t>The three major exams fall in Weeks 5, 10 and 15. Each one runs across its week as a continuous activity.</a:t>
+            </a:r>
+          </a:p>
+          <a:p>
+            <a:pPr>
+              <a:spcAft>
+                <a:spcPts val="800"/>
+              </a:spcAft>
+            </a:pPr>
+            <a:r>
+              <a:rPr sz="1700" b="0">
+                <a:solidFill>
+                  <a:srgbClr val="1C1C1A"/>
+                </a:solidFill>
+                <a:latin typeface="Calibri"/>
+              </a:rPr>
+              <a:t>That is the whole of what is fixed about them today. The rest arrives with the week.</a:t>
+            </a:r>
+          </a:p>
+        </p:txBody>
+      </p:sp>
       <p:pic>
         <p:nvPicPr>
-          <p:cNvPr id="6" name="Picture 5" descr="489e4f24b2c0a3c0.png"/>
+          <p:cNvPr id="7" name="Picture 6" descr="24899d3ce088ff77.png"/>
           <p:cNvPicPr>
             <a:picLocks noChangeAspect="1"/>
           </p:cNvPicPr>
@@ -6783,7 +6873,7 @@
         </p:blipFill>
         <p:spPr>
           <a:xfrm>
-            <a:off x="685800" y="2257832"/>
+            <a:off x="685800" y="4110000"/>
             <a:ext cx="10820095" cy="1509214"/>
           </a:xfrm>
           <a:prstGeom prst="rect">
@@ -6791,40 +6881,6 @@
           </a:prstGeom>
         </p:spPr>
       </p:pic>
-      <p:sp>
-        <p:nvSpPr>
-          <p:cNvPr id="7" name="TextBox 6"/>
-          <p:cNvSpPr txBox="1"/>
-          <p:nvPr/>
-        </p:nvSpPr>
-        <p:spPr>
-          <a:xfrm>
-            <a:off x="685800" y="4506976"/>
-            <a:ext cx="10820095" cy="1546352"/>
-          </a:xfrm>
-          <a:prstGeom prst="rect">
-            <a:avLst/>
-          </a:prstGeom>
-          <a:noFill/>
-        </p:spPr>
-        <p:txBody>
-          <a:bodyPr wrap="square" anchor="t">
-            <a:spAutoFit/>
-          </a:bodyPr>
-          <a:lstStyle/>
-          <a:p>
-            <a:r>
-              <a:rPr sz="2000" b="0">
-                <a:solidFill>
-                  <a:srgbClr val="1C1C1A"/>
-                </a:solidFill>
-                <a:latin typeface="Calibri"/>
-              </a:rPr>
-              <a:t>Build weeks fall at Weeks 3, 6, 9, 12 and 15. Weeks 17 to 20 are the capstone weeks. Every other week teaches. The three major exams fall in Weeks 5, 10 and 15. Each one runs across its week as a continuous activity. That is the whole of what is fixed about them today. The rest arrives with the week.</a:t>
-            </a:r>
-          </a:p>
-        </p:txBody>
-      </p:sp>
       <p:sp>
         <p:nvSpPr>
           <p:cNvPr id="8" name="Rectangle 7"/>
@@ -6886,7 +6942,7 @@
           <a:noFill/>
         </p:spPr>
         <p:txBody>
-          <a:bodyPr wrap="square" anchor="t">
+          <a:bodyPr wrap="square" anchor="t" lIns="0" rIns="0" tIns="0" bIns="0">
             <a:spAutoFit/>
           </a:bodyPr>
           <a:lstStyle/>
@@ -6920,7 +6976,7 @@
           <a:noFill/>
         </p:spPr>
         <p:txBody>
-          <a:bodyPr wrap="square" anchor="t">
+          <a:bodyPr wrap="square" anchor="t" lIns="0" rIns="0" tIns="0" bIns="0">
             <a:spAutoFit/>
           </a:bodyPr>
           <a:lstStyle/>
@@ -7070,7 +7126,7 @@
           <a:noFill/>
         </p:spPr>
         <p:txBody>
-          <a:bodyPr wrap="square" anchor="ctr">
+          <a:bodyPr wrap="square" anchor="ctr" lIns="0" rIns="0" tIns="0" bIns="0">
             <a:spAutoFit/>
           </a:bodyPr>
           <a:lstStyle/>
@@ -7140,7 +7196,7 @@
         <p:spPr>
           <a:xfrm>
             <a:off x="685800" y="1627632"/>
-            <a:ext cx="10820095" cy="3312160"/>
+            <a:ext cx="10820095" cy="2344928"/>
           </a:xfrm>
           <a:prstGeom prst="rect">
             <a:avLst/>
@@ -7148,18 +7204,18 @@
           <a:noFill/>
         </p:spPr>
         <p:txBody>
-          <a:bodyPr wrap="square" anchor="t">
+          <a:bodyPr wrap="square" anchor="t" lIns="0" rIns="0" tIns="0" bIns="0">
             <a:spAutoFit/>
           </a:bodyPr>
           <a:lstStyle/>
           <a:p>
             <a:pPr>
               <a:spcAft>
-                <a:spcPts val="900"/>
+                <a:spcPts val="600"/>
               </a:spcAft>
             </a:pPr>
             <a:r>
-              <a:rPr sz="2000" b="0">
+              <a:rPr sz="1300" b="0">
                 <a:solidFill>
                   <a:srgbClr val="1C1C1A"/>
                 </a:solidFill>
@@ -7171,11 +7227,11 @@
           <a:p>
             <a:pPr>
               <a:spcAft>
-                <a:spcPts val="900"/>
+                <a:spcPts val="600"/>
               </a:spcAft>
             </a:pPr>
             <a:r>
-              <a:rPr sz="2000" b="0">
+              <a:rPr sz="1300" b="0">
                 <a:solidFill>
                   <a:srgbClr val="1C1C1A"/>
                 </a:solidFill>
@@ -7187,11 +7243,11 @@
           <a:p>
             <a:pPr>
               <a:spcAft>
-                <a:spcPts val="900"/>
+                <a:spcPts val="600"/>
               </a:spcAft>
             </a:pPr>
             <a:r>
-              <a:rPr sz="2000" b="0">
+              <a:rPr sz="1300" b="0">
                 <a:solidFill>
                   <a:srgbClr val="1C1C1A"/>
                 </a:solidFill>
@@ -7203,11 +7259,11 @@
           <a:p>
             <a:pPr>
               <a:spcAft>
-                <a:spcPts val="900"/>
+                <a:spcPts val="600"/>
               </a:spcAft>
             </a:pPr>
             <a:r>
-              <a:rPr sz="2000" b="0">
+              <a:rPr sz="1300" b="0">
                 <a:solidFill>
                   <a:srgbClr val="1C1C1A"/>
                 </a:solidFill>
@@ -7220,7 +7276,7 @@
       </p:sp>
       <p:pic>
         <p:nvPicPr>
-          <p:cNvPr id="7" name="Picture 6" descr="26bcc4334f2d81ca.png"/>
+          <p:cNvPr id="7" name="Picture 6" descr="dfe99488c12c4e20.png"/>
           <p:cNvPicPr>
             <a:picLocks noChangeAspect="1"/>
           </p:cNvPicPr>
@@ -7234,7 +7290,7 @@
         </p:blipFill>
         <p:spPr>
           <a:xfrm>
-            <a:off x="685800" y="5067808"/>
+            <a:off x="685800" y="4624574"/>
             <a:ext cx="10820095" cy="937267"/>
           </a:xfrm>
           <a:prstGeom prst="rect">
@@ -7303,7 +7359,7 @@
           <a:noFill/>
         </p:spPr>
         <p:txBody>
-          <a:bodyPr wrap="square" anchor="t">
+          <a:bodyPr wrap="square" anchor="t" lIns="0" rIns="0" tIns="0" bIns="0">
             <a:spAutoFit/>
           </a:bodyPr>
           <a:lstStyle/>
@@ -7337,7 +7393,7 @@
           <a:noFill/>
         </p:spPr>
         <p:txBody>
-          <a:bodyPr wrap="square" anchor="t">
+          <a:bodyPr wrap="square" anchor="t" lIns="0" rIns="0" tIns="0" bIns="0">
             <a:spAutoFit/>
           </a:bodyPr>
           <a:lstStyle/>
@@ -7487,7 +7543,7 @@
           <a:noFill/>
         </p:spPr>
         <p:txBody>
-          <a:bodyPr wrap="square" anchor="ctr">
+          <a:bodyPr wrap="square" anchor="ctr" lIns="0" rIns="0" tIns="0" bIns="0">
             <a:spAutoFit/>
           </a:bodyPr>
           <a:lstStyle/>
@@ -7565,7 +7621,7 @@
           <a:noFill/>
         </p:spPr>
         <p:txBody>
-          <a:bodyPr wrap="square" anchor="t">
+          <a:bodyPr wrap="square" anchor="t" lIns="0" rIns="0" tIns="0" bIns="0">
             <a:spAutoFit/>
           </a:bodyPr>
           <a:lstStyle/>
@@ -7664,7 +7720,7 @@
           <a:noFill/>
         </p:spPr>
         <p:txBody>
-          <a:bodyPr wrap="square" anchor="t">
+          <a:bodyPr wrap="square" anchor="t" lIns="0" rIns="0" tIns="0" bIns="0">
             <a:spAutoFit/>
           </a:bodyPr>
           <a:lstStyle/>
@@ -7698,7 +7754,7 @@
           <a:noFill/>
         </p:spPr>
         <p:txBody>
-          <a:bodyPr wrap="square" anchor="t">
+          <a:bodyPr wrap="square" anchor="t" lIns="0" rIns="0" tIns="0" bIns="0">
             <a:spAutoFit/>
           </a:bodyPr>
           <a:lstStyle/>
@@ -7848,7 +7904,7 @@
           <a:noFill/>
         </p:spPr>
         <p:txBody>
-          <a:bodyPr wrap="square" anchor="ctr">
+          <a:bodyPr wrap="square" anchor="ctr" lIns="0" rIns="0" tIns="0" bIns="0">
             <a:spAutoFit/>
           </a:bodyPr>
           <a:lstStyle/>
@@ -7917,7 +7973,7 @@
         </p:nvSpPr>
         <p:spPr>
           <a:xfrm>
-            <a:off x="685800" y="3046984"/>
+            <a:off x="685800" y="2874264"/>
             <a:ext cx="3533546" cy="475488"/>
           </a:xfrm>
           <a:prstGeom prst="roundRect">
@@ -7972,7 +8028,7 @@
         </p:nvSpPr>
         <p:spPr>
           <a:xfrm>
-            <a:off x="4329074" y="3046984"/>
+            <a:off x="4329074" y="2874264"/>
             <a:ext cx="3533546" cy="475488"/>
           </a:xfrm>
           <a:prstGeom prst="roundRect">
@@ -8027,7 +8083,7 @@
         </p:nvSpPr>
         <p:spPr>
           <a:xfrm>
-            <a:off x="7972348" y="3046984"/>
+            <a:off x="7972348" y="2874264"/>
             <a:ext cx="3533546" cy="475488"/>
           </a:xfrm>
           <a:prstGeom prst="roundRect">
@@ -8082,8 +8138,8 @@
         </p:nvSpPr>
         <p:spPr>
           <a:xfrm>
-            <a:off x="685800" y="3723640"/>
-            <a:ext cx="10820095" cy="910336"/>
+            <a:off x="685800" y="3550920"/>
+            <a:ext cx="10820095" cy="1255776"/>
           </a:xfrm>
           <a:prstGeom prst="rect">
             <a:avLst/>
@@ -8091,7 +8147,7 @@
           <a:noFill/>
         </p:spPr>
         <p:txBody>
-          <a:bodyPr wrap="square" anchor="t">
+          <a:bodyPr wrap="square" anchor="t" lIns="0" rIns="0" tIns="0" bIns="0">
             <a:spAutoFit/>
           </a:bodyPr>
           <a:lstStyle/>
@@ -8174,7 +8230,7 @@
           <a:noFill/>
         </p:spPr>
         <p:txBody>
-          <a:bodyPr wrap="square" anchor="t">
+          <a:bodyPr wrap="square" anchor="t" lIns="0" rIns="0" tIns="0" bIns="0">
             <a:spAutoFit/>
           </a:bodyPr>
           <a:lstStyle/>
@@ -8208,7 +8264,7 @@
           <a:noFill/>
         </p:spPr>
         <p:txBody>
-          <a:bodyPr wrap="square" anchor="t">
+          <a:bodyPr wrap="square" anchor="t" lIns="0" rIns="0" tIns="0" bIns="0">
             <a:spAutoFit/>
           </a:bodyPr>
           <a:lstStyle/>
@@ -8358,7 +8414,7 @@
           <a:noFill/>
         </p:spPr>
         <p:txBody>
-          <a:bodyPr wrap="square" anchor="ctr">
+          <a:bodyPr wrap="square" anchor="ctr" lIns="0" rIns="0" tIns="0" bIns="0">
             <a:spAutoFit/>
           </a:bodyPr>
           <a:lstStyle/>
@@ -8427,8 +8483,8 @@
         </p:nvSpPr>
         <p:spPr>
           <a:xfrm>
-            <a:off x="685800" y="3330448"/>
-            <a:ext cx="10820095" cy="1020064"/>
+            <a:off x="685800" y="3157728"/>
+            <a:ext cx="10820095" cy="1365504"/>
           </a:xfrm>
           <a:prstGeom prst="rect">
             <a:avLst/>
@@ -8436,7 +8492,7 @@
           <a:noFill/>
         </p:spPr>
         <p:txBody>
-          <a:bodyPr wrap="square" anchor="t">
+          <a:bodyPr wrap="square" anchor="t" lIns="0" rIns="0" tIns="0" bIns="0">
             <a:spAutoFit/>
           </a:bodyPr>
           <a:lstStyle/>
@@ -8535,7 +8591,7 @@
           <a:noFill/>
         </p:spPr>
         <p:txBody>
-          <a:bodyPr wrap="square" anchor="t">
+          <a:bodyPr wrap="square" anchor="t" lIns="0" rIns="0" tIns="0" bIns="0">
             <a:spAutoFit/>
           </a:bodyPr>
           <a:lstStyle/>
@@ -8569,7 +8625,7 @@
           <a:noFill/>
         </p:spPr>
         <p:txBody>
-          <a:bodyPr wrap="square" anchor="t">
+          <a:bodyPr wrap="square" anchor="t" lIns="0" rIns="0" tIns="0" bIns="0">
             <a:spAutoFit/>
           </a:bodyPr>
           <a:lstStyle/>
@@ -8719,7 +8775,7 @@
           <a:noFill/>
         </p:spPr>
         <p:txBody>
-          <a:bodyPr wrap="square" anchor="ctr">
+          <a:bodyPr wrap="square" anchor="ctr" lIns="0" rIns="0" tIns="0" bIns="0">
             <a:spAutoFit/>
           </a:bodyPr>
           <a:lstStyle/>
@@ -8797,7 +8853,7 @@
           <a:noFill/>
         </p:spPr>
         <p:txBody>
-          <a:bodyPr wrap="square" anchor="t">
+          <a:bodyPr wrap="square" anchor="t" lIns="0" rIns="0" tIns="0" bIns="0">
             <a:spAutoFit/>
           </a:bodyPr>
           <a:lstStyle/>
@@ -8944,7 +9000,7 @@
           <a:noFill/>
         </p:spPr>
         <p:txBody>
-          <a:bodyPr wrap="square" anchor="t">
+          <a:bodyPr wrap="square" anchor="t" lIns="0" rIns="0" tIns="0" bIns="0">
             <a:spAutoFit/>
           </a:bodyPr>
           <a:lstStyle/>
@@ -8978,7 +9034,7 @@
           <a:noFill/>
         </p:spPr>
         <p:txBody>
-          <a:bodyPr wrap="square" anchor="t">
+          <a:bodyPr wrap="square" anchor="t" lIns="0" rIns="0" tIns="0" bIns="0">
             <a:spAutoFit/>
           </a:bodyPr>
           <a:lstStyle/>
@@ -9128,7 +9184,7 @@
           <a:noFill/>
         </p:spPr>
         <p:txBody>
-          <a:bodyPr wrap="square" anchor="ctr">
+          <a:bodyPr wrap="square" anchor="ctr" lIns="0" rIns="0" tIns="0" bIns="0">
             <a:spAutoFit/>
           </a:bodyPr>
           <a:lstStyle/>
@@ -9206,7 +9262,7 @@
           <a:noFill/>
         </p:spPr>
         <p:txBody>
-          <a:bodyPr wrap="square" anchor="t">
+          <a:bodyPr wrap="square" anchor="t" lIns="0" rIns="0" tIns="0" bIns="0">
             <a:spAutoFit/>
           </a:bodyPr>
           <a:lstStyle/>
@@ -9337,7 +9393,7 @@
           <a:noFill/>
         </p:spPr>
         <p:txBody>
-          <a:bodyPr wrap="square" anchor="t">
+          <a:bodyPr wrap="square" anchor="t" lIns="0" rIns="0" tIns="0" bIns="0">
             <a:spAutoFit/>
           </a:bodyPr>
           <a:lstStyle/>
@@ -9371,7 +9427,7 @@
           <a:noFill/>
         </p:spPr>
         <p:txBody>
-          <a:bodyPr wrap="square" anchor="t">
+          <a:bodyPr wrap="square" anchor="t" lIns="0" rIns="0" tIns="0" bIns="0">
             <a:spAutoFit/>
           </a:bodyPr>
           <a:lstStyle/>
@@ -9468,7 +9524,7 @@
           <a:noFill/>
         </p:spPr>
         <p:txBody>
-          <a:bodyPr wrap="square" anchor="ctr">
+          <a:bodyPr wrap="square" anchor="ctr" lIns="0" rIns="0" tIns="0" bIns="0">
             <a:spAutoFit/>
           </a:bodyPr>
           <a:lstStyle/>
@@ -9706,7 +9762,7 @@
           <a:noFill/>
         </p:spPr>
         <p:txBody>
-          <a:bodyPr wrap="square" anchor="t">
+          <a:bodyPr wrap="square" anchor="t" lIns="0" rIns="0" tIns="0" bIns="0">
             <a:spAutoFit/>
           </a:bodyPr>
           <a:lstStyle/>
@@ -9740,7 +9796,7 @@
           <a:noFill/>
         </p:spPr>
         <p:txBody>
-          <a:bodyPr wrap="square" anchor="t">
+          <a:bodyPr wrap="square" anchor="t" lIns="0" rIns="0" tIns="0" bIns="0">
             <a:spAutoFit/>
           </a:bodyPr>
           <a:lstStyle/>
@@ -9890,7 +9946,7 @@
           <a:noFill/>
         </p:spPr>
         <p:txBody>
-          <a:bodyPr wrap="square" anchor="ctr">
+          <a:bodyPr wrap="square" anchor="ctr" lIns="0" rIns="0" tIns="0" bIns="0">
             <a:spAutoFit/>
           </a:bodyPr>
           <a:lstStyle/>
@@ -9960,7 +10016,7 @@
         <p:spPr>
           <a:xfrm>
             <a:off x="685800" y="1627632"/>
-            <a:ext cx="457200" cy="437896"/>
+            <a:ext cx="457200" cy="351536"/>
           </a:xfrm>
           <a:prstGeom prst="rect">
             <a:avLst/>
@@ -9968,13 +10024,13 @@
           <a:noFill/>
         </p:spPr>
         <p:txBody>
-          <a:bodyPr wrap="square" anchor="t">
+          <a:bodyPr wrap="square" anchor="t" lIns="0" rIns="0" tIns="0" bIns="0">
             <a:spAutoFit/>
           </a:bodyPr>
           <a:lstStyle/>
           <a:p>
             <a:r>
-              <a:rPr sz="1900" b="1">
+              <a:rPr sz="1400" b="1">
                 <a:solidFill>
                   <a:srgbClr val="2B4A7D"/>
                 </a:solidFill>
@@ -9994,7 +10050,7 @@
         <p:spPr>
           <a:xfrm>
             <a:off x="1143000" y="1627632"/>
-            <a:ext cx="10362895" cy="437896"/>
+            <a:ext cx="10362895" cy="351536"/>
           </a:xfrm>
           <a:prstGeom prst="rect">
             <a:avLst/>
@@ -10002,13 +10058,13 @@
           <a:noFill/>
         </p:spPr>
         <p:txBody>
-          <a:bodyPr wrap="square" anchor="t">
+          <a:bodyPr wrap="square" anchor="t" lIns="0" rIns="0" tIns="0" bIns="0">
             <a:spAutoFit/>
           </a:bodyPr>
           <a:lstStyle/>
           <a:p>
             <a:r>
-              <a:rPr sz="1900" b="0">
+              <a:rPr sz="1400" b="0">
                 <a:solidFill>
                   <a:srgbClr val="1C1C1A"/>
                 </a:solidFill>
@@ -10027,8 +10083,8 @@
         </p:nvSpPr>
         <p:spPr>
           <a:xfrm>
-            <a:off x="685800" y="2120392"/>
-            <a:ext cx="457200" cy="766064"/>
+            <a:off x="685800" y="2034032"/>
+            <a:ext cx="457200" cy="351536"/>
           </a:xfrm>
           <a:prstGeom prst="rect">
             <a:avLst/>
@@ -10036,13 +10092,13 @@
           <a:noFill/>
         </p:spPr>
         <p:txBody>
-          <a:bodyPr wrap="square" anchor="t">
+          <a:bodyPr wrap="square" anchor="t" lIns="0" rIns="0" tIns="0" bIns="0">
             <a:spAutoFit/>
           </a:bodyPr>
           <a:lstStyle/>
           <a:p>
             <a:r>
-              <a:rPr sz="1900" b="1">
+              <a:rPr sz="1400" b="1">
                 <a:solidFill>
                   <a:srgbClr val="2B4A7D"/>
                 </a:solidFill>
@@ -10061,8 +10117,8 @@
         </p:nvSpPr>
         <p:spPr>
           <a:xfrm>
-            <a:off x="1143000" y="2120392"/>
-            <a:ext cx="10362895" cy="766064"/>
+            <a:off x="1143000" y="2034032"/>
+            <a:ext cx="10362895" cy="351536"/>
           </a:xfrm>
           <a:prstGeom prst="rect">
             <a:avLst/>
@@ -10070,13 +10126,13 @@
           <a:noFill/>
         </p:spPr>
         <p:txBody>
-          <a:bodyPr wrap="square" anchor="t">
+          <a:bodyPr wrap="square" anchor="t" lIns="0" rIns="0" tIns="0" bIns="0">
             <a:spAutoFit/>
           </a:bodyPr>
           <a:lstStyle/>
           <a:p>
             <a:r>
-              <a:rPr sz="1900" b="0">
+              <a:rPr sz="1400" b="0">
                 <a:solidFill>
                   <a:srgbClr val="1C1C1A"/>
                 </a:solidFill>
@@ -10095,8 +10151,8 @@
         </p:nvSpPr>
         <p:spPr>
           <a:xfrm>
-            <a:off x="685800" y="2941320"/>
-            <a:ext cx="457200" cy="766064"/>
+            <a:off x="685800" y="2440432"/>
+            <a:ext cx="457200" cy="351536"/>
           </a:xfrm>
           <a:prstGeom prst="rect">
             <a:avLst/>
@@ -10104,13 +10160,13 @@
           <a:noFill/>
         </p:spPr>
         <p:txBody>
-          <a:bodyPr wrap="square" anchor="t">
+          <a:bodyPr wrap="square" anchor="t" lIns="0" rIns="0" tIns="0" bIns="0">
             <a:spAutoFit/>
           </a:bodyPr>
           <a:lstStyle/>
           <a:p>
             <a:r>
-              <a:rPr sz="1900" b="1">
+              <a:rPr sz="1400" b="1">
                 <a:solidFill>
                   <a:srgbClr val="2B4A7D"/>
                 </a:solidFill>
@@ -10129,8 +10185,8 @@
         </p:nvSpPr>
         <p:spPr>
           <a:xfrm>
-            <a:off x="1143000" y="2941320"/>
-            <a:ext cx="10362895" cy="766064"/>
+            <a:off x="1143000" y="2440432"/>
+            <a:ext cx="10362895" cy="351536"/>
           </a:xfrm>
           <a:prstGeom prst="rect">
             <a:avLst/>
@@ -10138,13 +10194,13 @@
           <a:noFill/>
         </p:spPr>
         <p:txBody>
-          <a:bodyPr wrap="square" anchor="t">
+          <a:bodyPr wrap="square" anchor="t" lIns="0" rIns="0" tIns="0" bIns="0">
             <a:spAutoFit/>
           </a:bodyPr>
           <a:lstStyle/>
           <a:p>
             <a:r>
-              <a:rPr sz="1900" b="0">
+              <a:rPr sz="1400" b="0">
                 <a:solidFill>
                   <a:srgbClr val="1C1C1A"/>
                 </a:solidFill>
@@ -10163,8 +10219,8 @@
         </p:nvSpPr>
         <p:spPr>
           <a:xfrm>
-            <a:off x="685800" y="3762248"/>
-            <a:ext cx="457200" cy="766064"/>
+            <a:off x="685800" y="2846832"/>
+            <a:ext cx="457200" cy="593344"/>
           </a:xfrm>
           <a:prstGeom prst="rect">
             <a:avLst/>
@@ -10172,13 +10228,13 @@
           <a:noFill/>
         </p:spPr>
         <p:txBody>
-          <a:bodyPr wrap="square" anchor="t">
+          <a:bodyPr wrap="square" anchor="t" lIns="0" rIns="0" tIns="0" bIns="0">
             <a:spAutoFit/>
           </a:bodyPr>
           <a:lstStyle/>
           <a:p>
             <a:r>
-              <a:rPr sz="1900" b="1">
+              <a:rPr sz="1400" b="1">
                 <a:solidFill>
                   <a:srgbClr val="2B4A7D"/>
                 </a:solidFill>
@@ -10197,8 +10253,8 @@
         </p:nvSpPr>
         <p:spPr>
           <a:xfrm>
-            <a:off x="1143000" y="3762248"/>
-            <a:ext cx="10362895" cy="766064"/>
+            <a:off x="1143000" y="2846832"/>
+            <a:ext cx="10362895" cy="593344"/>
           </a:xfrm>
           <a:prstGeom prst="rect">
             <a:avLst/>
@@ -10206,13 +10262,13 @@
           <a:noFill/>
         </p:spPr>
         <p:txBody>
-          <a:bodyPr wrap="square" anchor="t">
+          <a:bodyPr wrap="square" anchor="t" lIns="0" rIns="0" tIns="0" bIns="0">
             <a:spAutoFit/>
           </a:bodyPr>
           <a:lstStyle/>
           <a:p>
             <a:r>
-              <a:rPr sz="1900" b="0">
+              <a:rPr sz="1400" b="0">
                 <a:solidFill>
                   <a:srgbClr val="1C1C1A"/>
                 </a:solidFill>
@@ -10231,8 +10287,8 @@
         </p:nvSpPr>
         <p:spPr>
           <a:xfrm>
-            <a:off x="685800" y="4583176"/>
-            <a:ext cx="457200" cy="766064"/>
+            <a:off x="685800" y="3495040"/>
+            <a:ext cx="457200" cy="351536"/>
           </a:xfrm>
           <a:prstGeom prst="rect">
             <a:avLst/>
@@ -10240,13 +10296,13 @@
           <a:noFill/>
         </p:spPr>
         <p:txBody>
-          <a:bodyPr wrap="square" anchor="t">
+          <a:bodyPr wrap="square" anchor="t" lIns="0" rIns="0" tIns="0" bIns="0">
             <a:spAutoFit/>
           </a:bodyPr>
           <a:lstStyle/>
           <a:p>
             <a:r>
-              <a:rPr sz="1900" b="1">
+              <a:rPr sz="1400" b="1">
                 <a:solidFill>
                   <a:srgbClr val="2B4A7D"/>
                 </a:solidFill>
@@ -10265,8 +10321,8 @@
         </p:nvSpPr>
         <p:spPr>
           <a:xfrm>
-            <a:off x="1143000" y="4583176"/>
-            <a:ext cx="10362895" cy="766064"/>
+            <a:off x="1143000" y="3495040"/>
+            <a:ext cx="10362895" cy="351536"/>
           </a:xfrm>
           <a:prstGeom prst="rect">
             <a:avLst/>
@@ -10274,13 +10330,13 @@
           <a:noFill/>
         </p:spPr>
         <p:txBody>
-          <a:bodyPr wrap="square" anchor="t">
+          <a:bodyPr wrap="square" anchor="t" lIns="0" rIns="0" tIns="0" bIns="0">
             <a:spAutoFit/>
           </a:bodyPr>
           <a:lstStyle/>
           <a:p>
             <a:r>
-              <a:rPr sz="1900" b="0">
+              <a:rPr sz="1400" b="0">
                 <a:solidFill>
                   <a:srgbClr val="1C1C1A"/>
                 </a:solidFill>
@@ -10299,8 +10355,8 @@
         </p:nvSpPr>
         <p:spPr>
           <a:xfrm>
-            <a:off x="685800" y="5404104"/>
-            <a:ext cx="457200" cy="437896"/>
+            <a:off x="685800" y="3901440"/>
+            <a:ext cx="457200" cy="351536"/>
           </a:xfrm>
           <a:prstGeom prst="rect">
             <a:avLst/>
@@ -10308,13 +10364,13 @@
           <a:noFill/>
         </p:spPr>
         <p:txBody>
-          <a:bodyPr wrap="square" anchor="t">
+          <a:bodyPr wrap="square" anchor="t" lIns="0" rIns="0" tIns="0" bIns="0">
             <a:spAutoFit/>
           </a:bodyPr>
           <a:lstStyle/>
           <a:p>
             <a:r>
-              <a:rPr sz="1900" b="1">
+              <a:rPr sz="1400" b="1">
                 <a:solidFill>
                   <a:srgbClr val="2B4A7D"/>
                 </a:solidFill>
@@ -10333,8 +10389,8 @@
         </p:nvSpPr>
         <p:spPr>
           <a:xfrm>
-            <a:off x="1143000" y="5404104"/>
-            <a:ext cx="10362895" cy="437896"/>
+            <a:off x="1143000" y="3901440"/>
+            <a:ext cx="10362895" cy="351536"/>
           </a:xfrm>
           <a:prstGeom prst="rect">
             <a:avLst/>
@@ -10342,13 +10398,13 @@
           <a:noFill/>
         </p:spPr>
         <p:txBody>
-          <a:bodyPr wrap="square" anchor="t">
+          <a:bodyPr wrap="square" anchor="t" lIns="0" rIns="0" tIns="0" bIns="0">
             <a:spAutoFit/>
           </a:bodyPr>
           <a:lstStyle/>
           <a:p>
             <a:r>
-              <a:rPr sz="1900" b="0">
+              <a:rPr sz="1400" b="0">
                 <a:solidFill>
                   <a:srgbClr val="1C1C1A"/>
                 </a:solidFill>
@@ -10367,8 +10423,8 @@
         </p:nvSpPr>
         <p:spPr>
           <a:xfrm>
-            <a:off x="685800" y="5896864"/>
-            <a:ext cx="457200" cy="437896"/>
+            <a:off x="685800" y="4307840"/>
+            <a:ext cx="457200" cy="351536"/>
           </a:xfrm>
           <a:prstGeom prst="rect">
             <a:avLst/>
@@ -10376,13 +10432,13 @@
           <a:noFill/>
         </p:spPr>
         <p:txBody>
-          <a:bodyPr wrap="square" anchor="t">
+          <a:bodyPr wrap="square" anchor="t" lIns="0" rIns="0" tIns="0" bIns="0">
             <a:spAutoFit/>
           </a:bodyPr>
           <a:lstStyle/>
           <a:p>
             <a:r>
-              <a:rPr sz="1900" b="1">
+              <a:rPr sz="1400" b="1">
                 <a:solidFill>
                   <a:srgbClr val="2B4A7D"/>
                 </a:solidFill>
@@ -10401,8 +10457,8 @@
         </p:nvSpPr>
         <p:spPr>
           <a:xfrm>
-            <a:off x="1143000" y="5896864"/>
-            <a:ext cx="10362895" cy="437896"/>
+            <a:off x="1143000" y="4307840"/>
+            <a:ext cx="10362895" cy="351536"/>
           </a:xfrm>
           <a:prstGeom prst="rect">
             <a:avLst/>
@@ -10410,13 +10466,13 @@
           <a:noFill/>
         </p:spPr>
         <p:txBody>
-          <a:bodyPr wrap="square" anchor="t">
+          <a:bodyPr wrap="square" anchor="t" lIns="0" rIns="0" tIns="0" bIns="0">
             <a:spAutoFit/>
           </a:bodyPr>
           <a:lstStyle/>
           <a:p>
             <a:r>
-              <a:rPr sz="1900" b="0">
+              <a:rPr sz="1400" b="0">
                 <a:solidFill>
                   <a:srgbClr val="1C1C1A"/>
                 </a:solidFill>
@@ -10427,9 +10483,33 @@
           </a:p>
         </p:txBody>
       </p:sp>
-      <p:sp>
-        <p:nvSpPr>
-          <p:cNvPr id="20" name="Rectangle 19"/>
+      <p:pic>
+        <p:nvPicPr>
+          <p:cNvPr id="20" name="Picture 19" descr="a6053ab5d44d430d.png"/>
+          <p:cNvPicPr>
+            <a:picLocks noChangeAspect="1"/>
+          </p:cNvPicPr>
+          <p:nvPr/>
+        </p:nvPicPr>
+        <p:blipFill>
+          <a:blip r:embed="rId2"/>
+          <a:stretch>
+            <a:fillRect/>
+          </a:stretch>
+        </p:blipFill>
+        <p:spPr>
+          <a:xfrm>
+            <a:off x="685800" y="5030548"/>
+            <a:ext cx="10820095" cy="856839"/>
+          </a:xfrm>
+          <a:prstGeom prst="rect">
+            <a:avLst/>
+          </a:prstGeom>
+        </p:spPr>
+      </p:pic>
+      <p:sp>
+        <p:nvSpPr>
+          <p:cNvPr id="21" name="Rectangle 20"/>
           <p:cNvSpPr/>
           <p:nvPr/>
         </p:nvSpPr>
@@ -10473,7 +10553,7 @@
       </p:sp>
       <p:sp>
         <p:nvSpPr>
-          <p:cNvPr id="21" name="TextBox 20"/>
+          <p:cNvPr id="22" name="TextBox 21"/>
           <p:cNvSpPr txBox="1"/>
           <p:nvPr/>
         </p:nvSpPr>
@@ -10488,7 +10568,7 @@
           <a:noFill/>
         </p:spPr>
         <p:txBody>
-          <a:bodyPr wrap="square" anchor="t">
+          <a:bodyPr wrap="square" anchor="t" lIns="0" rIns="0" tIns="0" bIns="0">
             <a:spAutoFit/>
           </a:bodyPr>
           <a:lstStyle/>
@@ -10507,7 +10587,7 @@
       </p:sp>
       <p:sp>
         <p:nvSpPr>
-          <p:cNvPr id="22" name="TextBox 21"/>
+          <p:cNvPr id="23" name="TextBox 22"/>
           <p:cNvSpPr txBox="1"/>
           <p:nvPr/>
         </p:nvSpPr>
@@ -10522,7 +10602,7 @@
           <a:noFill/>
         </p:spPr>
         <p:txBody>
-          <a:bodyPr wrap="square" anchor="t">
+          <a:bodyPr wrap="square" anchor="t" lIns="0" rIns="0" tIns="0" bIns="0">
             <a:spAutoFit/>
           </a:bodyPr>
           <a:lstStyle/>
@@ -10672,7 +10752,7 @@
           <a:noFill/>
         </p:spPr>
         <p:txBody>
-          <a:bodyPr wrap="square" anchor="ctr">
+          <a:bodyPr wrap="square" anchor="ctr" lIns="0" rIns="0" tIns="0" bIns="0">
             <a:spAutoFit/>
           </a:bodyPr>
           <a:lstStyle/>
@@ -10733,9 +10813,64 @@
           </a:p>
         </p:txBody>
       </p:sp>
+      <p:sp>
+        <p:nvSpPr>
+          <p:cNvPr id="6" name="TextBox 5"/>
+          <p:cNvSpPr txBox="1"/>
+          <p:nvPr/>
+        </p:nvSpPr>
+        <p:spPr>
+          <a:xfrm>
+            <a:off x="685800" y="1627632"/>
+            <a:ext cx="10820095" cy="1797304"/>
+          </a:xfrm>
+          <a:prstGeom prst="rect">
+            <a:avLst/>
+          </a:prstGeom>
+          <a:noFill/>
+        </p:spPr>
+        <p:txBody>
+          <a:bodyPr wrap="square" anchor="t" lIns="0" rIns="0" tIns="0" bIns="0">
+            <a:spAutoFit/>
+          </a:bodyPr>
+          <a:lstStyle/>
+          <a:p>
+            <a:pPr>
+              <a:spcAft>
+                <a:spcPts val="800"/>
+              </a:spcAft>
+            </a:pPr>
+            <a:r>
+              <a:rPr sz="1700" b="0">
+                <a:solidFill>
+                  <a:srgbClr val="1C1C1A"/>
+                </a:solidFill>
+                <a:latin typeface="Calibri"/>
+              </a:rPr>
+              <a:t>Saturday opens with a pen-and-paper recap paper drawn from the week's own interview question set. It runs for about two hours, it is AI-free by format, and it is ungraded.</a:t>
+            </a:r>
+          </a:p>
+          <a:p>
+            <a:pPr>
+              <a:spcAft>
+                <a:spcPts val="800"/>
+              </a:spcAft>
+            </a:pPr>
+            <a:r>
+              <a:rPr sz="1700" b="0">
+                <a:solidFill>
+                  <a:srgbClr val="1C1C1A"/>
+                </a:solidFill>
+                <a:latin typeface="Calibri"/>
+              </a:rPr>
+              <a:t>After a break, the Academic TA leads the solution discussion. Papers are swapped so you cross-evaluate a peer's answers, every answer is treated as an interview answer, and call-outs land at random.</a:t>
+            </a:r>
+          </a:p>
+        </p:txBody>
+      </p:sp>
       <p:pic>
         <p:nvPicPr>
-          <p:cNvPr id="6" name="Picture 5" descr="06622d9ed231779a.png"/>
+          <p:cNvPr id="7" name="Picture 6" descr="9940e22c4448d484.png"/>
           <p:cNvPicPr>
             <a:picLocks noChangeAspect="1"/>
           </p:cNvPicPr>
@@ -10749,7 +10884,7 @@
         </p:blipFill>
         <p:spPr>
           <a:xfrm>
-            <a:off x="685800" y="2368272"/>
+            <a:off x="685800" y="4393160"/>
             <a:ext cx="10820095" cy="942894"/>
           </a:xfrm>
           <a:prstGeom prst="rect">
@@ -10757,40 +10892,6 @@
           </a:prstGeom>
         </p:spPr>
       </p:pic>
-      <p:sp>
-        <p:nvSpPr>
-          <p:cNvPr id="7" name="TextBox 6"/>
-          <p:cNvSpPr txBox="1"/>
-          <p:nvPr/>
-        </p:nvSpPr>
-        <p:spPr>
-          <a:xfrm>
-            <a:off x="685800" y="4161536"/>
-            <a:ext cx="10820095" cy="1891792"/>
-          </a:xfrm>
-          <a:prstGeom prst="rect">
-            <a:avLst/>
-          </a:prstGeom>
-          <a:noFill/>
-        </p:spPr>
-        <p:txBody>
-          <a:bodyPr wrap="square" anchor="t">
-            <a:spAutoFit/>
-          </a:bodyPr>
-          <a:lstStyle/>
-          <a:p>
-            <a:r>
-              <a:rPr sz="2000" b="0">
-                <a:solidFill>
-                  <a:srgbClr val="1C1C1A"/>
-                </a:solidFill>
-                <a:latin typeface="Calibri"/>
-              </a:rPr>
-              <a:t>Saturday opens with a pen-and-paper recap paper drawn from the week's own interview question set. It runs for about two hours, it is AI-free by format, and it is ungraded. After a break, the Academic TA leads the solution discussion. Papers are swapped so you cross-evaluate a peer's answers, every answer is treated as an interview answer, and call-outs land at random.</a:t>
-            </a:r>
-          </a:p>
-        </p:txBody>
-      </p:sp>
       <p:sp>
         <p:nvSpPr>
           <p:cNvPr id="8" name="Rectangle 7"/>
@@ -10852,7 +10953,7 @@
           <a:noFill/>
         </p:spPr>
         <p:txBody>
-          <a:bodyPr wrap="square" anchor="t">
+          <a:bodyPr wrap="square" anchor="t" lIns="0" rIns="0" tIns="0" bIns="0">
             <a:spAutoFit/>
           </a:bodyPr>
           <a:lstStyle/>
@@ -10886,7 +10987,7 @@
           <a:noFill/>
         </p:spPr>
         <p:txBody>
-          <a:bodyPr wrap="square" anchor="t">
+          <a:bodyPr wrap="square" anchor="t" lIns="0" rIns="0" tIns="0" bIns="0">
             <a:spAutoFit/>
           </a:bodyPr>
           <a:lstStyle/>
@@ -11036,7 +11137,7 @@
           <a:noFill/>
         </p:spPr>
         <p:txBody>
-          <a:bodyPr wrap="square" anchor="ctr">
+          <a:bodyPr wrap="square" anchor="ctr" lIns="0" rIns="0" tIns="0" bIns="0">
             <a:spAutoFit/>
           </a:bodyPr>
           <a:lstStyle/>
@@ -11114,7 +11215,7 @@
           <a:noFill/>
         </p:spPr>
         <p:txBody>
-          <a:bodyPr wrap="square" anchor="t">
+          <a:bodyPr wrap="square" anchor="t" lIns="0" rIns="0" tIns="0" bIns="0">
             <a:spAutoFit/>
           </a:bodyPr>
           <a:lstStyle/>
@@ -11229,7 +11330,7 @@
           <a:noFill/>
         </p:spPr>
         <p:txBody>
-          <a:bodyPr wrap="square" anchor="t">
+          <a:bodyPr wrap="square" anchor="t" lIns="0" rIns="0" tIns="0" bIns="0">
             <a:spAutoFit/>
           </a:bodyPr>
           <a:lstStyle/>
@@ -11263,7 +11364,7 @@
           <a:noFill/>
         </p:spPr>
         <p:txBody>
-          <a:bodyPr wrap="square" anchor="t">
+          <a:bodyPr wrap="square" anchor="t" lIns="0" rIns="0" tIns="0" bIns="0">
             <a:spAutoFit/>
           </a:bodyPr>
           <a:lstStyle/>
@@ -11413,7 +11514,7 @@
           <a:noFill/>
         </p:spPr>
         <p:txBody>
-          <a:bodyPr wrap="square" anchor="ctr">
+          <a:bodyPr wrap="square" anchor="ctr" lIns="0" rIns="0" tIns="0" bIns="0">
             <a:spAutoFit/>
           </a:bodyPr>
           <a:lstStyle/>
@@ -11484,7 +11585,7 @@
         </p:nvGraphicFramePr>
         <p:xfrm>
           <a:off x="685800" y="1627632"/>
-          <a:ext cx="10820095" cy="2712720"/>
+          <a:ext cx="10820094" cy="1554480"/>
         </p:xfrm>
         <a:graphic>
           <a:graphicData uri="http://schemas.openxmlformats.org/drawingml/2006/table">
@@ -11493,17 +11594,17 @@
                 <a:tableStyleId>{2D5ABB26-0587-4C30-8999-92F81FD0307C}</a:tableStyleId>
               </a:tblPr>
               <a:tblGrid>
-                <a:gridCol w="5410047"/>
-                <a:gridCol w="5410048"/>
+                <a:gridCol w="1699551"/>
+                <a:gridCol w="9120543"/>
               </a:tblGrid>
-              <a:tr h="387096">
+              <a:tr h="310896">
                 <a:tc>
                   <a:txBody>
                     <a:bodyPr/>
                     <a:lstStyle/>
                     <a:p>
                       <a:r>
-                        <a:rPr sz="1600" b="1">
+                        <a:rPr sz="1000" b="1">
                           <a:solidFill>
                             <a:srgbClr val="FFFFFF"/>
                           </a:solidFill>
@@ -11525,7 +11626,7 @@
                     <a:lstStyle/>
                     <a:p>
                       <a:r>
-                        <a:rPr sz="1600" b="1">
+                        <a:rPr sz="1000" b="1">
                           <a:solidFill>
                             <a:srgbClr val="FFFFFF"/>
                           </a:solidFill>
@@ -11542,14 +11643,14 @@
                   </a:tcPr>
                 </a:tc>
               </a:tr>
-              <a:tr h="646176">
+              <a:tr h="310896">
                 <a:tc>
                   <a:txBody>
                     <a:bodyPr/>
                     <a:lstStyle/>
                     <a:p>
                       <a:r>
-                        <a:rPr sz="1500" b="0">
+                        <a:rPr sz="900" b="0">
                           <a:solidFill>
                             <a:srgbClr val="1C1C1A"/>
                           </a:solidFill>
@@ -11571,7 +11672,7 @@
                     <a:lstStyle/>
                     <a:p>
                       <a:r>
-                        <a:rPr sz="1500" b="0">
+                        <a:rPr sz="900" b="0">
                           <a:solidFill>
                             <a:srgbClr val="1C1C1A"/>
                           </a:solidFill>
@@ -11588,14 +11689,14 @@
                   </a:tcPr>
                 </a:tc>
               </a:tr>
-              <a:tr h="646176">
+              <a:tr h="310896">
                 <a:tc>
                   <a:txBody>
                     <a:bodyPr/>
                     <a:lstStyle/>
                     <a:p>
                       <a:r>
-                        <a:rPr sz="1500" b="0">
+                        <a:rPr sz="900" b="0">
                           <a:solidFill>
                             <a:srgbClr val="1C1C1A"/>
                           </a:solidFill>
@@ -11617,7 +11718,7 @@
                     <a:lstStyle/>
                     <a:p>
                       <a:r>
-                        <a:rPr sz="1500" b="0">
+                        <a:rPr sz="900" b="0">
                           <a:solidFill>
                             <a:srgbClr val="1C1C1A"/>
                           </a:solidFill>
@@ -11634,14 +11735,14 @@
                   </a:tcPr>
                 </a:tc>
               </a:tr>
-              <a:tr h="646176">
+              <a:tr h="310896">
                 <a:tc>
                   <a:txBody>
                     <a:bodyPr/>
                     <a:lstStyle/>
                     <a:p>
                       <a:r>
-                        <a:rPr sz="1500" b="0">
+                        <a:rPr sz="900" b="0">
                           <a:solidFill>
                             <a:srgbClr val="1C1C1A"/>
                           </a:solidFill>
@@ -11663,7 +11764,7 @@
                     <a:lstStyle/>
                     <a:p>
                       <a:r>
-                        <a:rPr sz="1500" b="0">
+                        <a:rPr sz="900" b="0">
                           <a:solidFill>
                             <a:srgbClr val="1C1C1A"/>
                           </a:solidFill>
@@ -11680,14 +11781,14 @@
                   </a:tcPr>
                 </a:tc>
               </a:tr>
-              <a:tr h="387096">
+              <a:tr h="310896">
                 <a:tc>
                   <a:txBody>
                     <a:bodyPr/>
                     <a:lstStyle/>
                     <a:p>
                       <a:r>
-                        <a:rPr sz="1500" b="0">
+                        <a:rPr sz="900" b="0">
                           <a:solidFill>
                             <a:srgbClr val="1C1C1A"/>
                           </a:solidFill>
@@ -11709,7 +11810,7 @@
                     <a:lstStyle/>
                     <a:p>
                       <a:r>
-                        <a:rPr sz="1500" b="0">
+                        <a:rPr sz="900" b="0">
                           <a:solidFill>
                             <a:srgbClr val="1C1C1A"/>
                           </a:solidFill>
@@ -11738,7 +11839,7 @@
         </p:nvSpPr>
         <p:spPr>
           <a:xfrm>
-            <a:off x="685800" y="4596384"/>
+            <a:off x="685800" y="3438144"/>
             <a:ext cx="10820095" cy="564896"/>
           </a:xfrm>
           <a:prstGeom prst="rect">
@@ -11747,7 +11848,7 @@
           <a:noFill/>
         </p:spPr>
         <p:txBody>
-          <a:bodyPr wrap="square" anchor="t">
+          <a:bodyPr wrap="square" anchor="t" lIns="0" rIns="0" tIns="0" bIns="0">
             <a:spAutoFit/>
           </a:bodyPr>
           <a:lstStyle/>
@@ -11771,7 +11872,7 @@
       </p:sp>
       <p:pic>
         <p:nvPicPr>
-          <p:cNvPr id="8" name="Picture 7" descr="81ddcf5b20931dab.png"/>
+          <p:cNvPr id="8" name="Picture 7" descr="d619ad4bf15c2aa6.png"/>
           <p:cNvPicPr>
             <a:picLocks noChangeAspect="1"/>
           </p:cNvPicPr>
@@ -11785,8 +11886,8 @@
         </p:blipFill>
         <p:spPr>
           <a:xfrm>
-            <a:off x="3679496" y="5289296"/>
-            <a:ext cx="4832701" cy="1097280"/>
+            <a:off x="1867233" y="4133087"/>
+            <a:ext cx="8457227" cy="1920240"/>
           </a:xfrm>
           <a:prstGeom prst="rect">
             <a:avLst/>
@@ -11854,7 +11955,7 @@
           <a:noFill/>
         </p:spPr>
         <p:txBody>
-          <a:bodyPr wrap="square" anchor="t">
+          <a:bodyPr wrap="square" anchor="t" lIns="0" rIns="0" tIns="0" bIns="0">
             <a:spAutoFit/>
           </a:bodyPr>
           <a:lstStyle/>
@@ -11888,7 +11989,7 @@
           <a:noFill/>
         </p:spPr>
         <p:txBody>
-          <a:bodyPr wrap="square" anchor="t">
+          <a:bodyPr wrap="square" anchor="t" lIns="0" rIns="0" tIns="0" bIns="0">
             <a:spAutoFit/>
           </a:bodyPr>
           <a:lstStyle/>
@@ -12038,7 +12139,7 @@
           <a:noFill/>
         </p:spPr>
         <p:txBody>
-          <a:bodyPr wrap="square" anchor="ctr">
+          <a:bodyPr wrap="square" anchor="ctr" lIns="0" rIns="0" tIns="0" bIns="0">
             <a:spAutoFit/>
           </a:bodyPr>
           <a:lstStyle/>
@@ -12107,8 +12208,8 @@
         </p:nvSpPr>
         <p:spPr>
           <a:xfrm>
-            <a:off x="685800" y="2930144"/>
-            <a:ext cx="10820095" cy="1820672"/>
+            <a:off x="685800" y="2757424"/>
+            <a:ext cx="10820095" cy="2166112"/>
           </a:xfrm>
           <a:prstGeom prst="rect">
             <a:avLst/>
@@ -12116,7 +12217,7 @@
           <a:noFill/>
         </p:spPr>
         <p:txBody>
-          <a:bodyPr wrap="square" anchor="t">
+          <a:bodyPr wrap="square" anchor="t" lIns="0" rIns="0" tIns="0" bIns="0">
             <a:spAutoFit/>
           </a:bodyPr>
           <a:lstStyle/>
@@ -12231,7 +12332,7 @@
           <a:noFill/>
         </p:spPr>
         <p:txBody>
-          <a:bodyPr wrap="square" anchor="t">
+          <a:bodyPr wrap="square" anchor="t" lIns="0" rIns="0" tIns="0" bIns="0">
             <a:spAutoFit/>
           </a:bodyPr>
           <a:lstStyle/>
@@ -12265,7 +12366,7 @@
           <a:noFill/>
         </p:spPr>
         <p:txBody>
-          <a:bodyPr wrap="square" anchor="t">
+          <a:bodyPr wrap="square" anchor="t" lIns="0" rIns="0" tIns="0" bIns="0">
             <a:spAutoFit/>
           </a:bodyPr>
           <a:lstStyle/>
@@ -12415,7 +12516,7 @@
           <a:noFill/>
         </p:spPr>
         <p:txBody>
-          <a:bodyPr wrap="square" anchor="ctr">
+          <a:bodyPr wrap="square" anchor="ctr" lIns="0" rIns="0" tIns="0" bIns="0">
             <a:spAutoFit/>
           </a:bodyPr>
           <a:lstStyle/>
@@ -12493,7 +12594,7 @@
           <a:noFill/>
         </p:spPr>
         <p:txBody>
-          <a:bodyPr wrap="square" anchor="t">
+          <a:bodyPr wrap="square" anchor="t" lIns="0" rIns="0" tIns="0" bIns="0">
             <a:spAutoFit/>
           </a:bodyPr>
           <a:lstStyle/>
@@ -12608,7 +12709,7 @@
           <a:noFill/>
         </p:spPr>
         <p:txBody>
-          <a:bodyPr wrap="square" anchor="t">
+          <a:bodyPr wrap="square" anchor="t" lIns="0" rIns="0" tIns="0" bIns="0">
             <a:spAutoFit/>
           </a:bodyPr>
           <a:lstStyle/>
@@ -12642,7 +12743,7 @@
           <a:noFill/>
         </p:spPr>
         <p:txBody>
-          <a:bodyPr wrap="square" anchor="t">
+          <a:bodyPr wrap="square" anchor="t" lIns="0" rIns="0" tIns="0" bIns="0">
             <a:spAutoFit/>
           </a:bodyPr>
           <a:lstStyle/>
@@ -12739,7 +12840,7 @@
           <a:noFill/>
         </p:spPr>
         <p:txBody>
-          <a:bodyPr wrap="square" anchor="ctr">
+          <a:bodyPr wrap="square" anchor="ctr" lIns="0" rIns="0" tIns="0" bIns="0">
             <a:spAutoFit/>
           </a:bodyPr>
           <a:lstStyle/>
@@ -12977,7 +13078,7 @@
           <a:noFill/>
         </p:spPr>
         <p:txBody>
-          <a:bodyPr wrap="square" anchor="t">
+          <a:bodyPr wrap="square" anchor="t" lIns="0" rIns="0" tIns="0" bIns="0">
             <a:spAutoFit/>
           </a:bodyPr>
           <a:lstStyle/>
@@ -13011,7 +13112,7 @@
           <a:noFill/>
         </p:spPr>
         <p:txBody>
-          <a:bodyPr wrap="square" anchor="t">
+          <a:bodyPr wrap="square" anchor="t" lIns="0" rIns="0" tIns="0" bIns="0">
             <a:spAutoFit/>
           </a:bodyPr>
           <a:lstStyle/>
@@ -13161,7 +13262,7 @@
           <a:noFill/>
         </p:spPr>
         <p:txBody>
-          <a:bodyPr wrap="square" anchor="ctr">
+          <a:bodyPr wrap="square" anchor="ctr" lIns="0" rIns="0" tIns="0" bIns="0">
             <a:spAutoFit/>
           </a:bodyPr>
           <a:lstStyle/>
@@ -13230,8 +13331,8 @@
         </p:nvSpPr>
         <p:spPr>
           <a:xfrm>
-            <a:off x="685800" y="2357120"/>
-            <a:ext cx="10820095" cy="2966720"/>
+            <a:off x="685800" y="2184400"/>
+            <a:ext cx="10820095" cy="3312160"/>
           </a:xfrm>
           <a:prstGeom prst="rect">
             <a:avLst/>
@@ -13239,7 +13340,7 @@
           <a:noFill/>
         </p:spPr>
         <p:txBody>
-          <a:bodyPr wrap="square" anchor="t">
+          <a:bodyPr wrap="square" anchor="t" lIns="0" rIns="0" tIns="0" bIns="0">
             <a:spAutoFit/>
           </a:bodyPr>
           <a:lstStyle/>
@@ -13370,7 +13471,7 @@
           <a:noFill/>
         </p:spPr>
         <p:txBody>
-          <a:bodyPr wrap="square" anchor="t">
+          <a:bodyPr wrap="square" anchor="t" lIns="0" rIns="0" tIns="0" bIns="0">
             <a:spAutoFit/>
           </a:bodyPr>
           <a:lstStyle/>
@@ -13404,7 +13505,7 @@
           <a:noFill/>
         </p:spPr>
         <p:txBody>
-          <a:bodyPr wrap="square" anchor="t">
+          <a:bodyPr wrap="square" anchor="t" lIns="0" rIns="0" tIns="0" bIns="0">
             <a:spAutoFit/>
           </a:bodyPr>
           <a:lstStyle/>
@@ -13554,7 +13655,7 @@
           <a:noFill/>
         </p:spPr>
         <p:txBody>
-          <a:bodyPr wrap="square" anchor="ctr">
+          <a:bodyPr wrap="square" anchor="ctr" lIns="0" rIns="0" tIns="0" bIns="0">
             <a:spAutoFit/>
           </a:bodyPr>
           <a:lstStyle/>
@@ -13615,9 +13716,80 @@
           </a:p>
         </p:txBody>
       </p:sp>
+      <p:sp>
+        <p:nvSpPr>
+          <p:cNvPr id="6" name="TextBox 5"/>
+          <p:cNvSpPr txBox="1"/>
+          <p:nvPr/>
+        </p:nvSpPr>
+        <p:spPr>
+          <a:xfrm>
+            <a:off x="685800" y="1627632"/>
+            <a:ext cx="10820095" cy="1820672"/>
+          </a:xfrm>
+          <a:prstGeom prst="rect">
+            <a:avLst/>
+          </a:prstGeom>
+          <a:noFill/>
+        </p:spPr>
+        <p:txBody>
+          <a:bodyPr wrap="square" anchor="t" lIns="0" rIns="0" tIns="0" bIns="0">
+            <a:spAutoFit/>
+          </a:bodyPr>
+          <a:lstStyle/>
+          <a:p>
+            <a:pPr>
+              <a:spcAft>
+                <a:spcPts val="900"/>
+              </a:spcAft>
+            </a:pPr>
+            <a:r>
+              <a:rPr sz="2000" b="0">
+                <a:solidFill>
+                  <a:srgbClr val="1C1C1A"/>
+                </a:solidFill>
+                <a:latin typeface="Calibri"/>
+              </a:rPr>
+              <a:t>Kalpa Group is a diversified global conglomerate with five business units across five industries, and it is headquartered in Singapore.</a:t>
+            </a:r>
+          </a:p>
+          <a:p>
+            <a:pPr>
+              <a:spcAft>
+                <a:spcPts val="900"/>
+              </a:spcAft>
+            </a:pPr>
+            <a:r>
+              <a:rPr sz="2000" b="0">
+                <a:solidFill>
+                  <a:srgbClr val="1C1C1A"/>
+                </a:solidFill>
+                <a:latin typeface="Calibri"/>
+              </a:rPr>
+              <a:t>Its largest engineering and data centre sits in Bengaluru.</a:t>
+            </a:r>
+          </a:p>
+          <a:p>
+            <a:pPr>
+              <a:spcAft>
+                <a:spcPts val="900"/>
+              </a:spcAft>
+            </a:pPr>
+            <a:r>
+              <a:rPr sz="2000" b="0">
+                <a:solidFill>
+                  <a:srgbClr val="1C1C1A"/>
+                </a:solidFill>
+                <a:latin typeface="Calibri"/>
+              </a:rPr>
+              <a:t>Every example you meet for the next twenty weeks happens inside this company.</a:t>
+            </a:r>
+          </a:p>
+        </p:txBody>
+      </p:sp>
       <p:pic>
         <p:nvPicPr>
-          <p:cNvPr id="6" name="Picture 5" descr="36aff7047c9e6bb3.png"/>
+          <p:cNvPr id="7" name="Picture 6" descr="2c4303c6ba942721.png"/>
           <p:cNvPicPr>
             <a:picLocks noChangeAspect="1"/>
           </p:cNvPicPr>
@@ -13631,85 +13803,14 @@
         </p:blipFill>
         <p:spPr>
           <a:xfrm>
-            <a:off x="685800" y="2550382"/>
-            <a:ext cx="4652640" cy="2580195"/>
+            <a:off x="3952332" y="3675887"/>
+            <a:ext cx="4287030" cy="2377440"/>
           </a:xfrm>
           <a:prstGeom prst="rect">
             <a:avLst/>
           </a:prstGeom>
         </p:spPr>
       </p:pic>
-      <p:sp>
-        <p:nvSpPr>
-          <p:cNvPr id="7" name="TextBox 6"/>
-          <p:cNvSpPr txBox="1"/>
-          <p:nvPr/>
-        </p:nvSpPr>
-        <p:spPr>
-          <a:xfrm>
-            <a:off x="5771244" y="2411984"/>
-            <a:ext cx="5734650" cy="2856992"/>
-          </a:xfrm>
-          <a:prstGeom prst="rect">
-            <a:avLst/>
-          </a:prstGeom>
-          <a:noFill/>
-        </p:spPr>
-        <p:txBody>
-          <a:bodyPr wrap="square" anchor="t">
-            <a:spAutoFit/>
-          </a:bodyPr>
-          <a:lstStyle/>
-          <a:p>
-            <a:pPr>
-              <a:spcAft>
-                <a:spcPts val="900"/>
-              </a:spcAft>
-            </a:pPr>
-            <a:r>
-              <a:rPr sz="2000" b="0">
-                <a:solidFill>
-                  <a:srgbClr val="1C1C1A"/>
-                </a:solidFill>
-                <a:latin typeface="Calibri"/>
-              </a:rPr>
-              <a:t>Kalpa Group is a diversified global conglomerate with five business units across five industries, and it is headquartered in Singapore.</a:t>
-            </a:r>
-          </a:p>
-          <a:p>
-            <a:pPr>
-              <a:spcAft>
-                <a:spcPts val="900"/>
-              </a:spcAft>
-            </a:pPr>
-            <a:r>
-              <a:rPr sz="2000" b="0">
-                <a:solidFill>
-                  <a:srgbClr val="1C1C1A"/>
-                </a:solidFill>
-                <a:latin typeface="Calibri"/>
-              </a:rPr>
-              <a:t>Its largest engineering and data centre sits in Bengaluru.</a:t>
-            </a:r>
-          </a:p>
-          <a:p>
-            <a:pPr>
-              <a:spcAft>
-                <a:spcPts val="900"/>
-              </a:spcAft>
-            </a:pPr>
-            <a:r>
-              <a:rPr sz="2000" b="0">
-                <a:solidFill>
-                  <a:srgbClr val="1C1C1A"/>
-                </a:solidFill>
-                <a:latin typeface="Calibri"/>
-              </a:rPr>
-              <a:t>Every example you meet for the next twenty weeks happens inside this company.</a:t>
-            </a:r>
-          </a:p>
-        </p:txBody>
-      </p:sp>
       <p:sp>
         <p:nvSpPr>
           <p:cNvPr id="8" name="Rectangle 7"/>
@@ -13771,7 +13872,7 @@
           <a:noFill/>
         </p:spPr>
         <p:txBody>
-          <a:bodyPr wrap="square" anchor="t">
+          <a:bodyPr wrap="square" anchor="t" lIns="0" rIns="0" tIns="0" bIns="0">
             <a:spAutoFit/>
           </a:bodyPr>
           <a:lstStyle/>
@@ -13805,7 +13906,7 @@
           <a:noFill/>
         </p:spPr>
         <p:txBody>
-          <a:bodyPr wrap="square" anchor="t">
+          <a:bodyPr wrap="square" anchor="t" lIns="0" rIns="0" tIns="0" bIns="0">
             <a:spAutoFit/>
           </a:bodyPr>
           <a:lstStyle/>
@@ -13955,7 +14056,7 @@
           <a:noFill/>
         </p:spPr>
         <p:txBody>
-          <a:bodyPr wrap="square" anchor="ctr">
+          <a:bodyPr wrap="square" anchor="ctr" lIns="0" rIns="0" tIns="0" bIns="0">
             <a:spAutoFit/>
           </a:bodyPr>
           <a:lstStyle/>
@@ -14033,7 +14134,7 @@
           <a:noFill/>
         </p:spPr>
         <p:txBody>
-          <a:bodyPr wrap="square" anchor="t">
+          <a:bodyPr wrap="square" anchor="t" lIns="0" rIns="0" tIns="0" bIns="0">
             <a:spAutoFit/>
           </a:bodyPr>
           <a:lstStyle/>
@@ -14148,7 +14249,7 @@
           <a:noFill/>
         </p:spPr>
         <p:txBody>
-          <a:bodyPr wrap="square" anchor="t">
+          <a:bodyPr wrap="square" anchor="t" lIns="0" rIns="0" tIns="0" bIns="0">
             <a:spAutoFit/>
           </a:bodyPr>
           <a:lstStyle/>
@@ -14182,7 +14283,7 @@
           <a:noFill/>
         </p:spPr>
         <p:txBody>
-          <a:bodyPr wrap="square" anchor="t">
+          <a:bodyPr wrap="square" anchor="t" lIns="0" rIns="0" tIns="0" bIns="0">
             <a:spAutoFit/>
           </a:bodyPr>
           <a:lstStyle/>
@@ -14332,7 +14433,7 @@
           <a:noFill/>
         </p:spPr>
         <p:txBody>
-          <a:bodyPr wrap="square" anchor="ctr">
+          <a:bodyPr wrap="square" anchor="ctr" lIns="0" rIns="0" tIns="0" bIns="0">
             <a:spAutoFit/>
           </a:bodyPr>
           <a:lstStyle/>
@@ -14395,7 +14496,7 @@
       </p:sp>
       <p:pic>
         <p:nvPicPr>
-          <p:cNvPr id="6" name="Picture 5" descr="5a1b69428e2b7777.png"/>
+          <p:cNvPr id="6" name="Picture 5" descr="c81ee94f0b0bdcfe.png"/>
           <p:cNvPicPr>
             <a:picLocks noChangeAspect="1"/>
           </p:cNvPicPr>
@@ -14426,7 +14527,7 @@
         <p:spPr>
           <a:xfrm>
             <a:off x="5771244" y="1627632"/>
-            <a:ext cx="5734650" cy="564896"/>
+            <a:ext cx="5734650" cy="513080"/>
           </a:xfrm>
           <a:prstGeom prst="rect">
             <a:avLst/>
@@ -14434,18 +14535,18 @@
           <a:noFill/>
         </p:spPr>
         <p:txBody>
-          <a:bodyPr wrap="square" anchor="t">
+          <a:bodyPr wrap="square" anchor="t" lIns="0" rIns="0" tIns="0" bIns="0">
             <a:spAutoFit/>
           </a:bodyPr>
           <a:lstStyle/>
           <a:p>
             <a:pPr>
               <a:spcAft>
-                <a:spcPts val="900"/>
+                <a:spcPts val="800"/>
               </a:spcAft>
             </a:pPr>
             <a:r>
-              <a:rPr sz="2000" b="0">
+              <a:rPr sz="1700" b="0">
                 <a:solidFill>
                   <a:srgbClr val="1C1C1A"/>
                 </a:solidFill>
@@ -14464,8 +14565,8 @@
         </p:nvSpPr>
         <p:spPr>
           <a:xfrm>
-            <a:off x="5771244" y="2320544"/>
-            <a:ext cx="5734650" cy="4112768"/>
+            <a:off x="5771244" y="2268728"/>
+            <a:ext cx="5734650" cy="3594608"/>
           </a:xfrm>
           <a:prstGeom prst="rect">
             <a:avLst/>
@@ -14473,18 +14574,18 @@
           <a:noFill/>
         </p:spPr>
         <p:txBody>
-          <a:bodyPr wrap="square" anchor="t">
+          <a:bodyPr wrap="square" anchor="t" lIns="0" rIns="0" tIns="0" bIns="0">
             <a:spAutoFit/>
           </a:bodyPr>
           <a:lstStyle/>
           <a:p>
             <a:pPr>
               <a:spcAft>
-                <a:spcPts val="900"/>
+                <a:spcPts val="800"/>
               </a:spcAft>
             </a:pPr>
             <a:r>
-              <a:rPr sz="2000" b="0">
+              <a:rPr sz="1700" b="0">
                 <a:solidFill>
                   <a:srgbClr val="1C1C1A"/>
                 </a:solidFill>
@@ -14496,11 +14597,11 @@
           <a:p>
             <a:pPr>
               <a:spcAft>
-                <a:spcPts val="900"/>
+                <a:spcPts val="800"/>
               </a:spcAft>
             </a:pPr>
             <a:r>
-              <a:rPr sz="2000" b="0">
+              <a:rPr sz="1700" b="0">
                 <a:solidFill>
                   <a:srgbClr val="1C1C1A"/>
                 </a:solidFill>
@@ -14512,11 +14613,11 @@
           <a:p>
             <a:pPr>
               <a:spcAft>
-                <a:spcPts val="900"/>
+                <a:spcPts val="800"/>
               </a:spcAft>
             </a:pPr>
             <a:r>
-              <a:rPr sz="2000" b="0">
+              <a:rPr sz="1700" b="0">
                 <a:solidFill>
                   <a:srgbClr val="1C1C1A"/>
                 </a:solidFill>
@@ -14528,11 +14629,11 @@
           <a:p>
             <a:pPr>
               <a:spcAft>
-                <a:spcPts val="900"/>
+                <a:spcPts val="800"/>
               </a:spcAft>
             </a:pPr>
             <a:r>
-              <a:rPr sz="2000" b="0">
+              <a:rPr sz="1700" b="0">
                 <a:solidFill>
                   <a:srgbClr val="1C1C1A"/>
                 </a:solidFill>
@@ -14544,11 +14645,11 @@
           <a:p>
             <a:pPr>
               <a:spcAft>
-                <a:spcPts val="900"/>
+                <a:spcPts val="800"/>
               </a:spcAft>
             </a:pPr>
             <a:r>
-              <a:rPr sz="2000" b="0">
+              <a:rPr sz="1700" b="0">
                 <a:solidFill>
                   <a:srgbClr val="1C1C1A"/>
                 </a:solidFill>
@@ -14620,7 +14721,7 @@
           <a:noFill/>
         </p:spPr>
         <p:txBody>
-          <a:bodyPr wrap="square" anchor="t">
+          <a:bodyPr wrap="square" anchor="t" lIns="0" rIns="0" tIns="0" bIns="0">
             <a:spAutoFit/>
           </a:bodyPr>
           <a:lstStyle/>
@@ -14654,7 +14755,7 @@
           <a:noFill/>
         </p:spPr>
         <p:txBody>
-          <a:bodyPr wrap="square" anchor="t">
+          <a:bodyPr wrap="square" anchor="t" lIns="0" rIns="0" tIns="0" bIns="0">
             <a:spAutoFit/>
           </a:bodyPr>
           <a:lstStyle/>
@@ -14804,7 +14905,7 @@
           <a:noFill/>
         </p:spPr>
         <p:txBody>
-          <a:bodyPr wrap="square" anchor="ctr">
+          <a:bodyPr wrap="square" anchor="ctr" lIns="0" rIns="0" tIns="0" bIns="0">
             <a:spAutoFit/>
           </a:bodyPr>
           <a:lstStyle/>
@@ -14882,7 +14983,7 @@
           <a:noFill/>
         </p:spPr>
         <p:txBody>
-          <a:bodyPr wrap="square" anchor="t">
+          <a:bodyPr wrap="square" anchor="t" lIns="0" rIns="0" tIns="0" bIns="0">
             <a:spAutoFit/>
           </a:bodyPr>
           <a:lstStyle/>
@@ -14997,7 +15098,7 @@
           <a:noFill/>
         </p:spPr>
         <p:txBody>
-          <a:bodyPr wrap="square" anchor="t">
+          <a:bodyPr wrap="square" anchor="t" lIns="0" rIns="0" tIns="0" bIns="0">
             <a:spAutoFit/>
           </a:bodyPr>
           <a:lstStyle/>
@@ -15031,7 +15132,7 @@
           <a:noFill/>
         </p:spPr>
         <p:txBody>
-          <a:bodyPr wrap="square" anchor="t">
+          <a:bodyPr wrap="square" anchor="t" lIns="0" rIns="0" tIns="0" bIns="0">
             <a:spAutoFit/>
           </a:bodyPr>
           <a:lstStyle/>
@@ -15181,7 +15282,7 @@
           <a:noFill/>
         </p:spPr>
         <p:txBody>
-          <a:bodyPr wrap="square" anchor="ctr">
+          <a:bodyPr wrap="square" anchor="ctr" lIns="0" rIns="0" tIns="0" bIns="0">
             <a:spAutoFit/>
           </a:bodyPr>
           <a:lstStyle/>
@@ -15259,7 +15360,7 @@
           <a:noFill/>
         </p:spPr>
         <p:txBody>
-          <a:bodyPr wrap="square" anchor="t">
+          <a:bodyPr wrap="square" anchor="t" lIns="0" rIns="0" tIns="0" bIns="0">
             <a:spAutoFit/>
           </a:bodyPr>
           <a:lstStyle/>
@@ -15406,7 +15507,7 @@
           <a:noFill/>
         </p:spPr>
         <p:txBody>
-          <a:bodyPr wrap="square" anchor="t">
+          <a:bodyPr wrap="square" anchor="t" lIns="0" rIns="0" tIns="0" bIns="0">
             <a:spAutoFit/>
           </a:bodyPr>
           <a:lstStyle/>
@@ -15440,7 +15541,7 @@
           <a:noFill/>
         </p:spPr>
         <p:txBody>
-          <a:bodyPr wrap="square" anchor="t">
+          <a:bodyPr wrap="square" anchor="t" lIns="0" rIns="0" tIns="0" bIns="0">
             <a:spAutoFit/>
           </a:bodyPr>
           <a:lstStyle/>
@@ -15590,7 +15691,7 @@
           <a:noFill/>
         </p:spPr>
         <p:txBody>
-          <a:bodyPr wrap="square" anchor="ctr">
+          <a:bodyPr wrap="square" anchor="ctr" lIns="0" rIns="0" tIns="0" bIns="0">
             <a:spAutoFit/>
           </a:bodyPr>
           <a:lstStyle/>
@@ -15660,7 +15761,7 @@
         <p:spPr>
           <a:xfrm>
             <a:off x="685800" y="1627632"/>
-            <a:ext cx="10820095" cy="965200"/>
+            <a:ext cx="10820095" cy="850899"/>
           </a:xfrm>
           <a:prstGeom prst="rect">
             <a:avLst/>
@@ -15704,7 +15805,7 @@
         <p:spPr>
           <a:xfrm>
             <a:off x="685800" y="1627632"/>
-            <a:ext cx="50292" cy="965200"/>
+            <a:ext cx="50292" cy="850899"/>
           </a:xfrm>
           <a:prstGeom prst="rect">
             <a:avLst/>
@@ -15748,7 +15849,7 @@
         <p:spPr>
           <a:xfrm>
             <a:off x="941832" y="1719072"/>
-            <a:ext cx="10362895" cy="818896"/>
+            <a:ext cx="10362895" cy="704595"/>
           </a:xfrm>
           <a:prstGeom prst="rect">
             <a:avLst/>
@@ -15756,13 +15857,13 @@
           <a:noFill/>
         </p:spPr>
         <p:txBody>
-          <a:bodyPr wrap="square" anchor="ctr">
+          <a:bodyPr wrap="square" anchor="ctr" lIns="0" rIns="0" tIns="0" bIns="0">
             <a:spAutoFit/>
           </a:bodyPr>
           <a:lstStyle/>
           <a:p>
             <a:r>
-              <a:rPr sz="2000" b="1">
+              <a:rPr sz="1700" b="1">
                 <a:solidFill>
                   <a:srgbClr val="2B4A7D"/>
                 </a:solidFill>
@@ -15771,7 +15872,7 @@
               <a:t>The claim. </a:t>
             </a:r>
             <a:r>
-              <a:rPr sz="2000" b="0">
+              <a:rPr sz="1700" b="0">
                 <a:solidFill>
                   <a:srgbClr val="1C1C1A"/>
                 </a:solidFill>
@@ -15791,8 +15892,8 @@
           <p:nvPr/>
         </p:nvGraphicFramePr>
         <p:xfrm>
-          <a:off x="685800" y="2757424"/>
-          <a:ext cx="10820095" cy="2325624"/>
+          <a:off x="685800" y="2643124"/>
+          <a:ext cx="10820094" cy="1634744"/>
         </p:xfrm>
         <a:graphic>
           <a:graphicData uri="http://schemas.openxmlformats.org/drawingml/2006/table">
@@ -15801,17 +15902,17 @@
                 <a:tableStyleId>{2D5ABB26-0587-4C30-8999-92F81FD0307C}</a:tableStyleId>
               </a:tblPr>
               <a:tblGrid>
-                <a:gridCol w="5410047"/>
-                <a:gridCol w="5410048"/>
+                <a:gridCol w="2749166"/>
+                <a:gridCol w="8070928"/>
               </a:tblGrid>
-              <a:tr h="387096">
+              <a:tr h="352552">
                 <a:tc>
                   <a:txBody>
                     <a:bodyPr/>
                     <a:lstStyle/>
                     <a:p>
                       <a:r>
-                        <a:rPr sz="1600" b="1">
+                        <a:rPr sz="1400" b="1">
                           <a:solidFill>
                             <a:srgbClr val="FFFFFF"/>
                           </a:solidFill>
@@ -15833,7 +15934,7 @@
                     <a:lstStyle/>
                     <a:p>
                       <a:r>
-                        <a:rPr sz="1600" b="1">
+                        <a:rPr sz="1400" b="1">
                           <a:solidFill>
                             <a:srgbClr val="FFFFFF"/>
                           </a:solidFill>
@@ -15850,14 +15951,14 @@
                   </a:tcPr>
                 </a:tc>
               </a:tr>
-              <a:tr h="646176">
+              <a:tr h="577088">
                 <a:tc>
                   <a:txBody>
                     <a:bodyPr/>
                     <a:lstStyle/>
                     <a:p>
                       <a:r>
-                        <a:rPr sz="1500" b="0">
+                        <a:rPr sz="1300" b="0">
                           <a:solidFill>
                             <a:srgbClr val="1C1C1A"/>
                           </a:solidFill>
@@ -15879,7 +15980,7 @@
                     <a:lstStyle/>
                     <a:p>
                       <a:r>
-                        <a:rPr sz="1500" b="0">
+                        <a:rPr sz="1300" b="0">
                           <a:solidFill>
                             <a:srgbClr val="1C1C1A"/>
                           </a:solidFill>
@@ -15896,14 +15997,14 @@
                   </a:tcPr>
                 </a:tc>
               </a:tr>
-              <a:tr h="646176">
+              <a:tr h="352552">
                 <a:tc>
                   <a:txBody>
                     <a:bodyPr/>
                     <a:lstStyle/>
                     <a:p>
                       <a:r>
-                        <a:rPr sz="1500" b="0">
+                        <a:rPr sz="1300" b="0">
                           <a:solidFill>
                             <a:srgbClr val="1C1C1A"/>
                           </a:solidFill>
@@ -15925,7 +16026,7 @@
                     <a:lstStyle/>
                     <a:p>
                       <a:r>
-                        <a:rPr sz="1500" b="0">
+                        <a:rPr sz="1300" b="0">
                           <a:solidFill>
                             <a:srgbClr val="1C1C1A"/>
                           </a:solidFill>
@@ -15942,14 +16043,14 @@
                   </a:tcPr>
                 </a:tc>
               </a:tr>
-              <a:tr h="646176">
+              <a:tr h="352552">
                 <a:tc>
                   <a:txBody>
                     <a:bodyPr/>
                     <a:lstStyle/>
                     <a:p>
                       <a:r>
-                        <a:rPr sz="1500" b="0">
+                        <a:rPr sz="1300" b="0">
                           <a:solidFill>
                             <a:srgbClr val="1C1C1A"/>
                           </a:solidFill>
@@ -15971,7 +16072,7 @@
                     <a:lstStyle/>
                     <a:p>
                       <a:r>
-                        <a:rPr sz="1500" b="0">
+                        <a:rPr sz="1300" b="0">
                           <a:solidFill>
                             <a:srgbClr val="1C1C1A"/>
                           </a:solidFill>
@@ -16000,8 +16101,8 @@
         </p:nvSpPr>
         <p:spPr>
           <a:xfrm>
-            <a:off x="685800" y="5339080"/>
-            <a:ext cx="10820095" cy="1310640"/>
+            <a:off x="685800" y="4533900"/>
+            <a:ext cx="10820095" cy="1157477"/>
           </a:xfrm>
           <a:prstGeom prst="rect">
             <a:avLst/>
@@ -16044,8 +16145,8 @@
         </p:nvSpPr>
         <p:spPr>
           <a:xfrm>
-            <a:off x="685800" y="5339080"/>
-            <a:ext cx="50292" cy="1310640"/>
+            <a:off x="685800" y="4533900"/>
+            <a:ext cx="50292" cy="1157477"/>
           </a:xfrm>
           <a:prstGeom prst="rect">
             <a:avLst/>
@@ -16088,8 +16189,8 @@
         </p:nvSpPr>
         <p:spPr>
           <a:xfrm>
-            <a:off x="941832" y="5430520"/>
-            <a:ext cx="10362895" cy="1164336"/>
+            <a:off x="941832" y="4625340"/>
+            <a:ext cx="10362895" cy="1011173"/>
           </a:xfrm>
           <a:prstGeom prst="rect">
             <a:avLst/>
@@ -16097,13 +16198,13 @@
           <a:noFill/>
         </p:spPr>
         <p:txBody>
-          <a:bodyPr wrap="square" anchor="ctr">
+          <a:bodyPr wrap="square" anchor="ctr" lIns="0" rIns="0" tIns="0" bIns="0">
             <a:spAutoFit/>
           </a:bodyPr>
           <a:lstStyle/>
           <a:p>
             <a:r>
-              <a:rPr sz="2000" b="1">
+              <a:rPr sz="1700" b="1">
                 <a:solidFill>
                   <a:srgbClr val="2B4A7D"/>
                 </a:solidFill>
@@ -16112,7 +16213,7 @@
               <a:t>The mental model. </a:t>
             </a:r>
             <a:r>
-              <a:rPr sz="2000" b="0">
+              <a:rPr sz="1700" b="0">
                 <a:solidFill>
                   <a:srgbClr val="1C1C1A"/>
                 </a:solidFill>
@@ -16184,7 +16285,7 @@
           <a:noFill/>
         </p:spPr>
         <p:txBody>
-          <a:bodyPr wrap="square" anchor="t">
+          <a:bodyPr wrap="square" anchor="t" lIns="0" rIns="0" tIns="0" bIns="0">
             <a:spAutoFit/>
           </a:bodyPr>
           <a:lstStyle/>
@@ -16218,7 +16319,7 @@
           <a:noFill/>
         </p:spPr>
         <p:txBody>
-          <a:bodyPr wrap="square" anchor="t">
+          <a:bodyPr wrap="square" anchor="t" lIns="0" rIns="0" tIns="0" bIns="0">
             <a:spAutoFit/>
           </a:bodyPr>
           <a:lstStyle/>

--- a/content/W01/D1/slides/C2_W01_D01_intro_STUDENT.pptx
+++ b/content/W01/D1/slides/C2_W01_D01_intro_STUDENT.pptx
@@ -3685,8 +3685,8 @@
         </p:blipFill>
         <p:spPr>
           <a:xfrm>
-            <a:off x="2178961" y="1627632"/>
-            <a:ext cx="7833772" cy="3805935"/>
+            <a:off x="1909191" y="1517904"/>
+            <a:ext cx="8373311" cy="4068064"/>
           </a:xfrm>
           <a:prstGeom prst="rect">
             <a:avLst/>
@@ -3701,8 +3701,8 @@
         </p:nvSpPr>
         <p:spPr>
           <a:xfrm>
-            <a:off x="685800" y="5543296"/>
-            <a:ext cx="10820095" cy="510032"/>
+            <a:off x="685800" y="5631688"/>
+            <a:ext cx="10820095" cy="421640"/>
           </a:xfrm>
           <a:prstGeom prst="rect">
             <a:avLst/>
@@ -3716,7 +3716,7 @@
           <a:lstStyle/>
           <a:p>
             <a:r>
-              <a:rPr sz="2000" b="0">
+              <a:rPr sz="1700" b="0">
                 <a:solidFill>
                   <a:srgbClr val="1C1C1A"/>
                 </a:solidFill>
@@ -5991,7 +5991,7 @@
         <p:spPr>
           <a:xfrm>
             <a:off x="685800" y="1627632"/>
-            <a:ext cx="10820095" cy="564896"/>
+            <a:ext cx="10820095" cy="443992"/>
           </a:xfrm>
           <a:prstGeom prst="rect">
             <a:avLst/>
@@ -6006,11 +6006,11 @@
           <a:p>
             <a:pPr>
               <a:spcAft>
-                <a:spcPts val="900"/>
+                <a:spcPts val="600"/>
               </a:spcAft>
             </a:pPr>
             <a:r>
-              <a:rPr sz="2000" b="0">
+              <a:rPr sz="1300" b="0">
                 <a:solidFill>
                   <a:srgbClr val="1C1C1A"/>
                 </a:solidFill>
@@ -6030,8 +6030,8 @@
           <p:nvPr/>
         </p:nvGraphicFramePr>
         <p:xfrm>
-          <a:off x="685800" y="2320544"/>
-          <a:ext cx="10820093" cy="2377440"/>
+          <a:off x="685800" y="2199640"/>
+          <a:ext cx="10820095" cy="2121408"/>
         </p:xfrm>
         <a:graphic>
           <a:graphicData uri="http://schemas.openxmlformats.org/drawingml/2006/table">
@@ -6040,9 +6040,9 @@
                 <a:tableStyleId>{2D5ABB26-0587-4C30-8999-92F81FD0307C}</a:tableStyleId>
               </a:tblPr>
               <a:tblGrid>
-                <a:gridCol w="1343028"/>
-                <a:gridCol w="1488597"/>
-                <a:gridCol w="7988468"/>
+                <a:gridCol w="777240"/>
+                <a:gridCol w="777240"/>
+                <a:gridCol w="9265615"/>
               </a:tblGrid>
               <a:tr h="310896">
                 <a:tc>
@@ -6112,7 +6112,7 @@
                   </a:tcPr>
                 </a:tc>
               </a:tr>
-              <a:tr h="438912">
+              <a:tr h="310896">
                 <a:tc>
                   <a:txBody>
                     <a:bodyPr/>
@@ -6316,7 +6316,7 @@
                   </a:tcPr>
                 </a:tc>
               </a:tr>
-              <a:tr h="438912">
+              <a:tr h="310896">
                 <a:tc>
                   <a:txBody>
                     <a:bodyPr/>
@@ -6472,7 +6472,7 @@
         </p:blipFill>
         <p:spPr>
           <a:xfrm>
-            <a:off x="685800" y="5063966"/>
+            <a:off x="685800" y="5019262"/>
             <a:ext cx="10820095" cy="879411"/>
           </a:xfrm>
           <a:prstGeom prst="rect">
